--- a/downloads/DCT_V2_Ch08_Slides.pptx
+++ b/downloads/DCT_V2_Ch08_Slides.pptx
@@ -28,9 +28,10 @@
     <p:sldId id="276" r:id="rId22"/>
     <p:sldId id="277" r:id="rId23"/>
     <p:sldId id="278" r:id="rId24"/>
+    <p:sldId id="279" r:id="rId25"/>
   </p:sldIdLst>
   <p:notesMasterIdLst>
-    <p:notesMasterId r:id="rId25"/>
+    <p:notesMasterId r:id="rId26"/>
   </p:notesMasterIdLst>
   <p:sldSz cx="12192000" cy="6858000"/>
   <p:notesSz cx="6858000" cy="12192000"/>
@@ -129,7 +130,7 @@
   <p:extLst>
     <p:ext uri="{521415D9-36F7-43E2-AB2F-B90AF26B5E84}">
       <p14:sectionLst xmlns:p14="http://schemas.microsoft.com/office/powerpoint/2010/main">
-        <p14:section name="Opening" id="{62aa274e-e09e-3619-0bdf-bc0e487ffda5}">
+        <p14:section name="Opening" id="{07b20f68-5ff4-22d2-2233-4abecd8cab9b}">
           <p14:sldIdLst>
             <p14:sldId id="256"/>
             <p14:sldId id="257"/>
@@ -137,41 +138,41 @@
             <p14:sldId id="259"/>
           </p14:sldIdLst>
         </p14:section>
-        <p14:section name="8.1 From Bellman to the HJB Equation" id="{57881d62-b9ad-2e0f-2853-6553b60b2291}">
+        <p14:section name="8.1 From Bellman to the HJB Equation" id="{80519f64-8dce-f66e-a3e0-764a2f40f306}">
           <p14:sldIdLst>
             <p14:sldId id="260"/>
             <p14:sldId id="261"/>
             <p14:sldId id="262"/>
           </p14:sldIdLst>
         </p14:section>
-        <p14:section name="8.2 Prices and Rules" id="{06d822e7-7bf0-400c-eabd-629a86be9aed}">
+        <p14:section name="8.2 Prices and Rules" id="{d7917824-3b23-6584-aa0e-07451d39b7d7}">
           <p14:sldIdLst>
             <p14:sldId id="263"/>
           </p14:sldIdLst>
         </p14:section>
-        <p14:section name="8.3 Certifying a Rule" id="{e56ab28e-971d-3bd5-9218-f892db92de38}">
+        <p14:section name="8.3 Certifying a Rule" id="{617782d7-d297-eb4a-b97b-f1e0a7b7b522}">
           <p14:sldIdLst>
             <p14:sldId id="264"/>
           </p14:sldIdLst>
         </p14:section>
-        <p14:section name="8.4 Corners in the Value" id="{ce04089f-5e18-31f3-a4ce-1b9c07faa990}">
+        <p14:section name="8.4 Corners in the Value" id="{06aadd8c-dc39-ab1a-dca4-6d09584bfe18}">
           <p14:sldIdLst>
             <p14:sldId id="265"/>
           </p14:sldIdLst>
         </p14:section>
-        <p14:section name="8.5 Linear–Quadratic Rules" id="{646bdaa8-2cd3-b126-1dcb-0a35b399093a}">
+        <p14:section name="8.5 Linear–Quadratic Rules" id="{5b499c6b-1094-705e-2302-a8dc27681b2e}">
           <p14:sldIdLst>
             <p14:sldId id="266"/>
             <p14:sldId id="267"/>
           </p14:sldIdLst>
         </p14:section>
-        <p14:section name="8.6 Computing Values and Rules" id="{0565ce67-a207-34e9-6225-04ccea77abe0}">
+        <p14:section name="8.6 Computing Values and Rules" id="{7ad533de-4942-c478-e0c6-d59b550b0125}">
           <p14:sldIdLst>
             <p14:sldId id="268"/>
             <p14:sldId id="269"/>
           </p14:sldIdLst>
         </p14:section>
-        <p14:section name="Worked Example 8.1" id="{14f33021-810c-e102-f905-e9df281d95cc}">
+        <p14:section name="Worked Example 8.1" id="{76d58980-9dfa-c41f-18cb-d87af1942b53}">
           <p14:sldIdLst>
             <p14:sldId id="270"/>
             <p14:sldId id="271"/>
@@ -180,16 +181,21 @@
             <p14:sldId id="274"/>
           </p14:sldIdLst>
         </p14:section>
-        <p14:section name="AXIOM Lab 2.8" id="{86bfae2f-0dba-23ac-abf6-c70cfb8c8a88}">
+        <p14:section name="In Practice" id="{36ff509e-4e14-541b-9dcd-60527a94ce3d}">
           <p14:sldIdLst>
             <p14:sldId id="275"/>
           </p14:sldIdLst>
         </p14:section>
-        <p14:section name="Close" id="{0f7739fa-ef65-4949-9574-c9afb23926ab}">
+        <p14:section name="AXIOM Lab 2.8" id="{01080c37-3c6c-2ab5-89f9-51aab9e0338c}">
           <p14:sldIdLst>
             <p14:sldId id="276"/>
+          </p14:sldIdLst>
+        </p14:section>
+        <p14:section name="Close" id="{62e1dfe8-8a0f-90ad-9672-1a4d050362c0}">
+          <p14:sldIdLst>
             <p14:sldId id="277"/>
             <p14:sldId id="278"/>
+            <p14:sldId id="279"/>
           </p14:sldIdLst>
         </p14:section>
       </p14:sectionLst>
@@ -1652,7 +1658,7 @@
           <a:p>
             <a:r>
               <a:rPr lang="en-US" dirty="0"/>
-              <a:t>AXIOM Lab 2.8. What to look for: a Riccati coefficient that makes the residual vanish and a second root that fails the limit condition; approvals where the marginal premium equals the value of an approval; a rule on the predicted gap that never overshoots; corners at 43.45 and 55; errors that halve with the grid.</a:t>
+              <a:t>In Practice, Chapter 8: Brokers Pace a Large Sale. A real organization's decision of this chapter's kind, told from its published record; every figure is cited in the book. The lesson for Meridian: Quadratic declarations give linear rules; measure the costs, as Citigroup did when impact followed a 3/5 power law. Sources: Almgren and Chriss (2000/01), Journal of Risk; Almgren et al. (2005), Risk; SEC staff (2020); Lorenz and Almgren (2011); Risk.net (2017).</a:t>
             </a:r>
             <a:endParaRPr lang="en-US" dirty="0"/>
           </a:p>
@@ -1740,7 +1746,7 @@
           <a:p>
             <a:r>
               <a:rPr lang="en-US" dirty="0"/>
-              <a:t>Key Takeaways, Chapter 8.</a:t>
+              <a:t>AXIOM Lab 2.8. What to look for: a Riccati coefficient that makes the residual vanish and a second root that fails the limit condition; approvals where the marginal premium equals the value of an approval; a rule on the predicted gap that never overshoots; corners at 43.45 and 55; errors that halve with the grid.</a:t>
             </a:r>
             <a:endParaRPr lang="en-US" dirty="0"/>
           </a:p>
@@ -1828,7 +1834,7 @@
           <a:p>
             <a:r>
               <a:rPr lang="en-US" dirty="0"/>
-              <a:t>The notebook and workbook are on the course website, www.dynamiccorporatetransformation.com.</a:t>
+              <a:t>Key Takeaways, Chapter 8.</a:t>
             </a:r>
             <a:endParaRPr lang="en-US" dirty="0"/>
           </a:p>
@@ -1916,7 +1922,7 @@
           <a:p>
             <a:r>
               <a:rPr lang="en-US" dirty="0"/>
-              <a:t>The Scope and Limits box of Section 8.5 and the Further Reading point ahead to Part III, Enterprise Optimization Under Uncertainty, which Chapter 9, Stochastic Enterprise Optimization, opens.</a:t>
+              <a:t>The notebook and workbook are on the course website, www.dynamiccorporatetransformation.com.</a:t>
             </a:r>
             <a:endParaRPr lang="en-US" dirty="0"/>
           </a:p>
@@ -1940,6 +1946,94 @@
             <a:fld id="{F7021451-1387-4CA6-816F-3879F97B5CBC}" type="slidenum">
               <a:rPr lang="en-US"/>
               <a:t>23</a:t>
+            </a:fld>
+            <a:endParaRPr lang="en-US"/>
+          </a:p>
+        </p:txBody>
+      </p:sp>
+    </p:spTree>
+    <p:extLst>
+      <p:ext uri="{BB962C8B-B14F-4D97-AF65-F5344CB8AC3E}">
+        <p14:creationId xmlns:p14="http://schemas.microsoft.com/office/powerpoint/2010/main" val="1024086991"/>
+      </p:ext>
+    </p:extLst>
+  </p:cSld>
+  <p:clrMapOvr>
+    <a:masterClrMapping/>
+  </p:clrMapOvr>
+</p:notes>
+</file>
+
+<file path=ppt/notesSlides/notesSlide24.xml><?xml version="1.0" encoding="utf-8"?>
+<p:notes xmlns:a="http://schemas.openxmlformats.org/drawingml/2006/main" xmlns:r="http://schemas.openxmlformats.org/officeDocument/2006/relationships" xmlns:p="http://schemas.openxmlformats.org/presentationml/2006/main">
+  <p:cSld>
+    <p:spTree>
+      <p:nvGrpSpPr>
+        <p:cNvPr id="1" name=""/>
+        <p:cNvGrpSpPr/>
+        <p:nvPr/>
+      </p:nvGrpSpPr>
+      <p:grpSpPr>
+        <a:xfrm>
+          <a:off x="0" y="0"/>
+          <a:ext cx="0" cy="0"/>
+          <a:chOff x="0" y="0"/>
+          <a:chExt cx="0" cy="0"/>
+        </a:xfrm>
+      </p:grpSpPr>
+      <p:sp>
+        <p:nvSpPr>
+          <p:cNvPr id="2" name="Slide Image Placeholder 1"/>
+          <p:cNvSpPr>
+            <a:spLocks noGrp="1" noRot="1" noChangeAspect="1"/>
+          </p:cNvSpPr>
+          <p:nvPr>
+            <p:ph type="sldImg"/>
+          </p:nvPr>
+        </p:nvSpPr>
+        <p:spPr/>
+      </p:sp>
+      <p:sp>
+        <p:nvSpPr>
+          <p:cNvPr id="3" name="Notes Placeholder 2"/>
+          <p:cNvSpPr>
+            <a:spLocks noGrp="1"/>
+          </p:cNvSpPr>
+          <p:nvPr>
+            <p:ph type="body" idx="1"/>
+          </p:nvPr>
+        </p:nvSpPr>
+        <p:spPr/>
+        <p:txBody>
+          <a:bodyPr/>
+          <a:lstStyle/>
+          <a:p>
+            <a:r>
+              <a:rPr lang="en-US" dirty="0"/>
+              <a:t>The Scope and Limits box of Section 8.5 and the Further Reading point ahead to Part III, Enterprise Optimization Under Uncertainty, which Chapter 9, Stochastic Enterprise Optimization, opens.</a:t>
+            </a:r>
+            <a:endParaRPr lang="en-US" dirty="0"/>
+          </a:p>
+        </p:txBody>
+      </p:sp>
+      <p:sp>
+        <p:nvSpPr>
+          <p:cNvPr id="4" name="Slide Number Placeholder 3"/>
+          <p:cNvSpPr>
+            <a:spLocks noGrp="1"/>
+          </p:cNvSpPr>
+          <p:nvPr>
+            <p:ph type="sldNum" sz="quarter" idx="10"/>
+          </p:nvPr>
+        </p:nvSpPr>
+        <p:spPr/>
+        <p:txBody>
+          <a:bodyPr/>
+          <a:lstStyle/>
+          <a:p>
+            <a:fld id="{F7021451-1387-4CA6-816F-3879F97B5CBC}" type="slidenum">
+              <a:rPr lang="en-US"/>
+              <a:t>24</a:t>
             </a:fld>
             <a:endParaRPr lang="en-US"/>
           </a:p>
@@ -12908,7 +13002,7 @@
                   <a:schemeClr val="accent1"/>
                 </a:solidFill>
               </a:rPr>
-              <a:t>AXIOM LAB 2.8 · MODULE AXIOM-08</a:t>
+              <a:t>IN PRACTICE · OPTIMAL EXECUTION</a:t>
             </a:r>
             <a:endParaRPr lang="en-US" sz="1200" dirty="0"/>
           </a:p>
@@ -12949,804 +13043,26 @@
                 <a:ea typeface="Cambria" pitchFamily="34" charset="-122"/>
                 <a:cs typeface="Cambria" pitchFamily="34" charset="-120"/>
               </a:rPr>
-              <a:t>Steering by the value, in AXIOM</a:t>
+              <a:t>Brokers pace a large sale with a rule</a:t>
             </a:r>
             <a:endParaRPr lang="en-US" sz="3200" dirty="0"/>
           </a:p>
         </p:txBody>
       </p:sp>
-      <p:pic>
-        <p:nvPicPr>
-          <p:cNvPr id="5" name="AXIOM logo" descr="AXIOM">    </p:cNvPr>
-          <p:cNvPicPr>
-            <a:picLocks noChangeAspect="1"/>
-          </p:cNvPicPr>
-          <p:nvPr/>
-        </p:nvPicPr>
-        <p:blipFill>
-          <a:blip r:embed="rId1"/>
-          <a:stretch>
-            <a:fillRect/>
-          </a:stretch>
-        </p:blipFill>
-        <p:spPr>
-          <a:xfrm>
-            <a:off x="9539935" y="310896"/>
-            <a:ext cx="2103120" cy="420624"/>
-          </a:xfrm>
-          <a:prstGeom prst="rect">
-            <a:avLst/>
-          </a:prstGeom>
-        </p:spPr>
-      </p:pic>
-      <p:sp>
-        <p:nvSpPr>
-          <p:cNvPr id="6" name="Situation"/>
-          <p:cNvSpPr txBox="1"/>
-          <p:nvPr/>
-        </p:nvSpPr>
-        <p:spPr>
-          <a:xfrm>
-            <a:off x="548640" y="1645920"/>
-            <a:ext cx="11094415" cy="777240"/>
-          </a:xfrm>
-          <a:prstGeom prst="rect">
-            <a:avLst/>
-          </a:prstGeom>
-          <a:noFill/>
-          <a:ln/>
-        </p:spPr>
-        <p:txBody>
-          <a:bodyPr wrap="square" lIns="0" tIns="0" rIns="0" bIns="0" rtlCol="0" anchor="t"/>
-          <a:lstStyle/>
-          <a:p>
-            <a:pPr indent="0" marL="0">
-              <a:buNone/>
-            </a:pPr>
-            <a:r>
-              <a:rPr lang="en-US" sz="1500" dirty="0">
-                <a:solidFill>
-                  <a:schemeClr val="tx1"/>
-                </a:solidFill>
-              </a:rPr>
-              <a:t>Human resources must propose a standing rule for approving hires against the engineering gap, and the board wants a certificate that no other rule does better. Open AXIOM, choose Lab 2.8 and load the Meridian hiring instance and Chapter 6's capability instance.</a:t>
-            </a:r>
-            <a:endParaRPr lang="en-US" sz="1500" dirty="0"/>
-          </a:p>
-        </p:txBody>
-      </p:sp>
-      <p:sp>
-        <p:nvSpPr>
-          <p:cNvPr id="7" name="Flow line"/>
+      <p:sp>
+        <p:nvSpPr>
+          <p:cNvPr id="5" name="Card"/>
           <p:cNvSpPr/>
           <p:nvPr/>
         </p:nvSpPr>
         <p:spPr>
           <a:xfrm>
-            <a:off x="1658082" y="2880360"/>
-            <a:ext cx="8875532" cy="0"/>
-          </a:xfrm>
-          <a:prstGeom prst="line">
-            <a:avLst/>
-          </a:prstGeom>
-          <a:noFill/>
-          <a:ln w="25400">
-            <a:solidFill>
-              <a:srgbClr val="C4CBD8"/>
-            </a:solidFill>
-            <a:prstDash val="solid"/>
-          </a:ln>
-        </p:spPr>
-      </p:sp>
-      <p:sp>
-        <p:nvSpPr>
-          <p:cNvPr id="8" name="Number"/>
-          <p:cNvSpPr/>
-          <p:nvPr/>
-        </p:nvSpPr>
-        <p:spPr>
-          <a:xfrm>
-            <a:off x="1383762" y="2606040"/>
-            <a:ext cx="548640" cy="548640"/>
-          </a:xfrm>
-          <a:prstGeom prst="ellipse">
-            <a:avLst/>
-          </a:prstGeom>
-          <a:solidFill>
-            <a:schemeClr val="accent1"/>
-          </a:solidFill>
-          <a:ln w="6350">
-            <a:solidFill>
-              <a:schemeClr val="accent1"/>
-            </a:solidFill>
-            <a:prstDash val="solid"/>
-          </a:ln>
-        </p:spPr>
-      </p:sp>
-      <p:sp>
-        <p:nvSpPr>
-          <p:cNvPr id="9" name="Text 5"/>
-          <p:cNvSpPr txBox="1"/>
-          <p:nvPr/>
-        </p:nvSpPr>
-        <p:spPr>
-          <a:xfrm>
-            <a:off x="1383762" y="2606040"/>
-            <a:ext cx="548640" cy="548640"/>
-          </a:xfrm>
-          <a:prstGeom prst="rect">
-            <a:avLst/>
-          </a:prstGeom>
-          <a:noFill/>
-          <a:ln/>
-        </p:spPr>
-        <p:txBody>
-          <a:bodyPr wrap="square" lIns="0" tIns="0" rIns="0" bIns="0" rtlCol="0" anchor="ctr"/>
-          <a:lstStyle/>
-          <a:p>
-            <a:pPr algn="ctr" indent="0" marL="0">
-              <a:buNone/>
-            </a:pPr>
-            <a:r>
-              <a:rPr lang="en-US" sz="1600" b="1" dirty="0">
-                <a:solidFill>
-                  <a:schemeClr val="bg1"/>
-                </a:solidFill>
-                <a:latin typeface="Calibri" pitchFamily="34" charset="0"/>
-                <a:ea typeface="Calibri" pitchFamily="34" charset="-122"/>
-                <a:cs typeface="Calibri" pitchFamily="34" charset="-120"/>
-              </a:rPr>
-              <a:t>1</a:t>
-            </a:r>
-            <a:endParaRPr lang="en-US" sz="1600" dirty="0"/>
-          </a:p>
-        </p:txBody>
-      </p:sp>
-      <p:sp>
-        <p:nvSpPr>
-          <p:cNvPr id="10" name="Flow head"/>
-          <p:cNvSpPr txBox="1"/>
-          <p:nvPr/>
-        </p:nvSpPr>
-        <p:spPr>
-          <a:xfrm>
-            <a:off x="621792" y="3291840"/>
-            <a:ext cx="2072579" cy="548640"/>
-          </a:xfrm>
-          <a:prstGeom prst="rect">
-            <a:avLst/>
-          </a:prstGeom>
-          <a:noFill/>
-          <a:ln/>
-        </p:spPr>
-        <p:txBody>
-          <a:bodyPr wrap="square" lIns="0" tIns="0" rIns="0" bIns="0" rtlCol="0" anchor="t"/>
-          <a:lstStyle/>
-          <a:p>
-            <a:pPr algn="ctr" indent="0" marL="0">
-              <a:buNone/>
-            </a:pPr>
-            <a:r>
-              <a:rPr lang="en-US" sz="1600" b="1" dirty="0">
-                <a:solidFill>
-                  <a:schemeClr val="tx1"/>
-                </a:solidFill>
-                <a:latin typeface="Cambria" pitchFamily="34" charset="0"/>
-                <a:ea typeface="Cambria" pitchFamily="34" charset="-122"/>
-                <a:cs typeface="Cambria" pitchFamily="34" charset="-120"/>
-              </a:rPr>
-              <a:t>Assemble the equation</a:t>
-            </a:r>
-            <a:endParaRPr lang="en-US" sz="1600" dirty="0"/>
-          </a:p>
-        </p:txBody>
-      </p:sp>
-      <p:sp>
-        <p:nvSpPr>
-          <p:cNvPr id="11" name="Flow text"/>
-          <p:cNvSpPr txBox="1"/>
-          <p:nvPr/>
-        </p:nvSpPr>
-        <p:spPr>
-          <a:xfrm>
-            <a:off x="640080" y="3867912"/>
-            <a:ext cx="2036003" cy="1554480"/>
-          </a:xfrm>
-          <a:prstGeom prst="rect">
-            <a:avLst/>
-          </a:prstGeom>
-          <a:noFill/>
-          <a:ln/>
-        </p:spPr>
-        <p:txBody>
-          <a:bodyPr wrap="square" lIns="0" tIns="0" rIns="0" bIns="0" rtlCol="0" anchor="t"/>
-          <a:lstStyle/>
-          <a:p>
-            <a:pPr algn="ctr" indent="0" marL="0">
-              <a:buNone/>
-            </a:pPr>
-            <a:r>
-              <a:rPr lang="en-US" sz="1400" dirty="0">
-                <a:solidFill>
-                  <a:schemeClr val="tx2"/>
-                </a:solidFill>
-              </a:rPr>
-              <a:t>Try quadratic values; map the residual and its bound; find both roots.</a:t>
-            </a:r>
-            <a:endParaRPr lang="en-US" sz="1400" dirty="0"/>
-          </a:p>
-        </p:txBody>
-      </p:sp>
-      <p:sp>
-        <p:nvSpPr>
-          <p:cNvPr id="12" name="Number"/>
-          <p:cNvSpPr/>
-          <p:nvPr/>
-        </p:nvSpPr>
-        <p:spPr>
-          <a:xfrm>
-            <a:off x="3602645" y="2606040"/>
-            <a:ext cx="548640" cy="548640"/>
-          </a:xfrm>
-          <a:prstGeom prst="ellipse">
-            <a:avLst/>
-          </a:prstGeom>
-          <a:solidFill>
-            <a:schemeClr val="accent1"/>
-          </a:solidFill>
-          <a:ln w="6350">
-            <a:solidFill>
-              <a:schemeClr val="accent1"/>
-            </a:solidFill>
-            <a:prstDash val="solid"/>
-          </a:ln>
-        </p:spPr>
-      </p:sp>
-      <p:sp>
-        <p:nvSpPr>
-          <p:cNvPr id="13" name="Text 9"/>
-          <p:cNvSpPr txBox="1"/>
-          <p:nvPr/>
-        </p:nvSpPr>
-        <p:spPr>
-          <a:xfrm>
-            <a:off x="3602645" y="2606040"/>
-            <a:ext cx="548640" cy="548640"/>
-          </a:xfrm>
-          <a:prstGeom prst="rect">
-            <a:avLst/>
-          </a:prstGeom>
-          <a:noFill/>
-          <a:ln/>
-        </p:spPr>
-        <p:txBody>
-          <a:bodyPr wrap="square" lIns="0" tIns="0" rIns="0" bIns="0" rtlCol="0" anchor="ctr"/>
-          <a:lstStyle/>
-          <a:p>
-            <a:pPr algn="ctr" indent="0" marL="0">
-              <a:buNone/>
-            </a:pPr>
-            <a:r>
-              <a:rPr lang="en-US" sz="1600" b="1" dirty="0">
-                <a:solidFill>
-                  <a:schemeClr val="bg1"/>
-                </a:solidFill>
-                <a:latin typeface="Calibri" pitchFamily="34" charset="0"/>
-                <a:ea typeface="Calibri" pitchFamily="34" charset="-122"/>
-                <a:cs typeface="Calibri" pitchFamily="34" charset="-120"/>
-              </a:rPr>
-              <a:t>2</a:t>
-            </a:r>
-            <a:endParaRPr lang="en-US" sz="1600" dirty="0"/>
-          </a:p>
-        </p:txBody>
-      </p:sp>
-      <p:sp>
-        <p:nvSpPr>
-          <p:cNvPr id="14" name="Flow head"/>
-          <p:cNvSpPr txBox="1"/>
-          <p:nvPr/>
-        </p:nvSpPr>
-        <p:spPr>
-          <a:xfrm>
-            <a:off x="2840675" y="3291840"/>
-            <a:ext cx="2072579" cy="548640"/>
-          </a:xfrm>
-          <a:prstGeom prst="rect">
-            <a:avLst/>
-          </a:prstGeom>
-          <a:noFill/>
-          <a:ln/>
-        </p:spPr>
-        <p:txBody>
-          <a:bodyPr wrap="square" lIns="0" tIns="0" rIns="0" bIns="0" rtlCol="0" anchor="t"/>
-          <a:lstStyle/>
-          <a:p>
-            <a:pPr algn="ctr" indent="0" marL="0">
-              <a:buNone/>
-            </a:pPr>
-            <a:r>
-              <a:rPr lang="en-US" sz="1600" b="1" dirty="0">
-                <a:solidFill>
-                  <a:schemeClr val="tx1"/>
-                </a:solidFill>
-                <a:latin typeface="Cambria" pitchFamily="34" charset="0"/>
-                <a:ea typeface="Cambria" pitchFamily="34" charset="-122"/>
-                <a:cs typeface="Cambria" pitchFamily="34" charset="-120"/>
-              </a:rPr>
-              <a:t>Read the Hamiltonian</a:t>
-            </a:r>
-            <a:endParaRPr lang="en-US" sz="1600" dirty="0"/>
-          </a:p>
-        </p:txBody>
-      </p:sp>
-      <p:sp>
-        <p:nvSpPr>
-          <p:cNvPr id="15" name="Flow text"/>
-          <p:cNvSpPr txBox="1"/>
-          <p:nvPr/>
-        </p:nvSpPr>
-        <p:spPr>
-          <a:xfrm>
-            <a:off x="2858963" y="3867912"/>
-            <a:ext cx="2036003" cy="1554480"/>
-          </a:xfrm>
-          <a:prstGeom prst="rect">
-            <a:avLst/>
-          </a:prstGeom>
-          <a:noFill/>
-          <a:ln/>
-        </p:spPr>
-        <p:txBody>
-          <a:bodyPr wrap="square" lIns="0" tIns="0" rIns="0" bIns="0" rtlCol="0" anchor="t"/>
-          <a:lstStyle/>
-          <a:p>
-            <a:pPr algn="ctr" indent="0" marL="0">
-              <a:buNone/>
-            </a:pPr>
-            <a:r>
-              <a:rPr lang="en-US" sz="1400" dirty="0">
-                <a:solidFill>
-                  <a:schemeClr val="tx2"/>
-                </a:solidFill>
-              </a:rPr>
-              <a:t>Plot it against the approval rate; find where the premium meets the value.</a:t>
-            </a:r>
-            <a:endParaRPr lang="en-US" sz="1400" dirty="0"/>
-          </a:p>
-        </p:txBody>
-      </p:sp>
-      <p:sp>
-        <p:nvSpPr>
-          <p:cNvPr id="16" name="Number"/>
-          <p:cNvSpPr/>
-          <p:nvPr/>
-        </p:nvSpPr>
-        <p:spPr>
-          <a:xfrm>
-            <a:off x="5821528" y="2606040"/>
-            <a:ext cx="548640" cy="548640"/>
-          </a:xfrm>
-          <a:prstGeom prst="ellipse">
-            <a:avLst/>
-          </a:prstGeom>
-          <a:solidFill>
-            <a:schemeClr val="accent1"/>
-          </a:solidFill>
-          <a:ln w="6350">
-            <a:solidFill>
-              <a:schemeClr val="accent1"/>
-            </a:solidFill>
-            <a:prstDash val="solid"/>
-          </a:ln>
-        </p:spPr>
-      </p:sp>
-      <p:sp>
-        <p:nvSpPr>
-          <p:cNvPr id="17" name="Text 13"/>
-          <p:cNvSpPr txBox="1"/>
-          <p:nvPr/>
-        </p:nvSpPr>
-        <p:spPr>
-          <a:xfrm>
-            <a:off x="5821528" y="2606040"/>
-            <a:ext cx="548640" cy="548640"/>
-          </a:xfrm>
-          <a:prstGeom prst="rect">
-            <a:avLst/>
-          </a:prstGeom>
-          <a:noFill/>
-          <a:ln/>
-        </p:spPr>
-        <p:txBody>
-          <a:bodyPr wrap="square" lIns="0" tIns="0" rIns="0" bIns="0" rtlCol="0" anchor="ctr"/>
-          <a:lstStyle/>
-          <a:p>
-            <a:pPr algn="ctr" indent="0" marL="0">
-              <a:buNone/>
-            </a:pPr>
-            <a:r>
-              <a:rPr lang="en-US" sz="1600" b="1" dirty="0">
-                <a:solidFill>
-                  <a:schemeClr val="bg1"/>
-                </a:solidFill>
-                <a:latin typeface="Calibri" pitchFamily="34" charset="0"/>
-                <a:ea typeface="Calibri" pitchFamily="34" charset="-122"/>
-                <a:cs typeface="Calibri" pitchFamily="34" charset="-120"/>
-              </a:rPr>
-              <a:t>3</a:t>
-            </a:r>
-            <a:endParaRPr lang="en-US" sz="1600" dirty="0"/>
-          </a:p>
-        </p:txBody>
-      </p:sp>
-      <p:sp>
-        <p:nvSpPr>
-          <p:cNvPr id="18" name="Flow head"/>
-          <p:cNvSpPr txBox="1"/>
-          <p:nvPr/>
-        </p:nvSpPr>
-        <p:spPr>
-          <a:xfrm>
-            <a:off x="5059558" y="3291840"/>
-            <a:ext cx="2072579" cy="548640"/>
-          </a:xfrm>
-          <a:prstGeom prst="rect">
-            <a:avLst/>
-          </a:prstGeom>
-          <a:noFill/>
-          <a:ln/>
-        </p:spPr>
-        <p:txBody>
-          <a:bodyPr wrap="square" lIns="0" tIns="0" rIns="0" bIns="0" rtlCol="0" anchor="t"/>
-          <a:lstStyle/>
-          <a:p>
-            <a:pPr algn="ctr" indent="0" marL="0">
-              <a:buNone/>
-            </a:pPr>
-            <a:r>
-              <a:rPr lang="en-US" sz="1600" b="1" dirty="0">
-                <a:solidFill>
-                  <a:schemeClr val="tx1"/>
-                </a:solidFill>
-                <a:latin typeface="Cambria" pitchFamily="34" charset="0"/>
-                <a:ea typeface="Cambria" pitchFamily="34" charset="-122"/>
-                <a:cs typeface="Cambria" pitchFamily="34" charset="-120"/>
-              </a:rPr>
-              <a:t>Generate and simulate rules</a:t>
-            </a:r>
-            <a:endParaRPr lang="en-US" sz="1600" dirty="0"/>
-          </a:p>
-        </p:txBody>
-      </p:sp>
-      <p:sp>
-        <p:nvSpPr>
-          <p:cNvPr id="19" name="Flow text"/>
-          <p:cNvSpPr txBox="1"/>
-          <p:nvPr/>
-        </p:nvSpPr>
-        <p:spPr>
-          <a:xfrm>
-            <a:off x="5077846" y="3867912"/>
-            <a:ext cx="2036003" cy="1554480"/>
-          </a:xfrm>
-          <a:prstGeom prst="rect">
-            <a:avLst/>
-          </a:prstGeom>
-          <a:noFill/>
-          <a:ln/>
-        </p:spPr>
-        <p:txBody>
-          <a:bodyPr wrap="square" lIns="0" tIns="0" rIns="0" bIns="0" rtlCol="0" anchor="t"/>
-          <a:lstStyle/>
-          <a:p>
-            <a:pPr algn="ctr" indent="0" marL="0">
-              <a:buNone/>
-            </a:pPr>
-            <a:r>
-              <a:rPr lang="en-US" sz="1400" dirty="0">
-                <a:solidFill>
-                  <a:schemeClr val="tx2"/>
-                </a:solidFill>
-              </a:rPr>
-              <a:t>With and without the delay, beside Volume I's rules and the predicted gap.</a:t>
-            </a:r>
-            <a:endParaRPr lang="en-US" sz="1400" dirty="0"/>
-          </a:p>
-        </p:txBody>
-      </p:sp>
-      <p:sp>
-        <p:nvSpPr>
-          <p:cNvPr id="20" name="Number"/>
-          <p:cNvSpPr/>
-          <p:nvPr/>
-        </p:nvSpPr>
-        <p:spPr>
-          <a:xfrm>
-            <a:off x="8040411" y="2606040"/>
-            <a:ext cx="548640" cy="548640"/>
-          </a:xfrm>
-          <a:prstGeom prst="ellipse">
-            <a:avLst/>
-          </a:prstGeom>
-          <a:solidFill>
-            <a:schemeClr val="accent1"/>
-          </a:solidFill>
-          <a:ln w="6350">
-            <a:solidFill>
-              <a:schemeClr val="accent1"/>
-            </a:solidFill>
-            <a:prstDash val="solid"/>
-          </a:ln>
-        </p:spPr>
-      </p:sp>
-      <p:sp>
-        <p:nvSpPr>
-          <p:cNvPr id="21" name="Text 17"/>
-          <p:cNvSpPr txBox="1"/>
-          <p:nvPr/>
-        </p:nvSpPr>
-        <p:spPr>
-          <a:xfrm>
-            <a:off x="8040411" y="2606040"/>
-            <a:ext cx="548640" cy="548640"/>
-          </a:xfrm>
-          <a:prstGeom prst="rect">
-            <a:avLst/>
-          </a:prstGeom>
-          <a:noFill/>
-          <a:ln/>
-        </p:spPr>
-        <p:txBody>
-          <a:bodyPr wrap="square" lIns="0" tIns="0" rIns="0" bIns="0" rtlCol="0" anchor="ctr"/>
-          <a:lstStyle/>
-          <a:p>
-            <a:pPr algn="ctr" indent="0" marL="0">
-              <a:buNone/>
-            </a:pPr>
-            <a:r>
-              <a:rPr lang="en-US" sz="1600" b="1" dirty="0">
-                <a:solidFill>
-                  <a:schemeClr val="bg1"/>
-                </a:solidFill>
-                <a:latin typeface="Calibri" pitchFamily="34" charset="0"/>
-                <a:ea typeface="Calibri" pitchFamily="34" charset="-122"/>
-                <a:cs typeface="Calibri" pitchFamily="34" charset="-120"/>
-              </a:rPr>
-              <a:t>4</a:t>
-            </a:r>
-            <a:endParaRPr lang="en-US" sz="1600" dirty="0"/>
-          </a:p>
-        </p:txBody>
-      </p:sp>
-      <p:sp>
-        <p:nvSpPr>
-          <p:cNvPr id="22" name="Flow head"/>
-          <p:cNvSpPr txBox="1"/>
-          <p:nvPr/>
-        </p:nvSpPr>
-        <p:spPr>
-          <a:xfrm>
-            <a:off x="7278441" y="3291840"/>
-            <a:ext cx="2072579" cy="548640"/>
-          </a:xfrm>
-          <a:prstGeom prst="rect">
-            <a:avLst/>
-          </a:prstGeom>
-          <a:noFill/>
-          <a:ln/>
-        </p:spPr>
-        <p:txBody>
-          <a:bodyPr wrap="square" lIns="0" tIns="0" rIns="0" bIns="0" rtlCol="0" anchor="t"/>
-          <a:lstStyle/>
-          <a:p>
-            <a:pPr algn="ctr" indent="0" marL="0">
-              <a:buNone/>
-            </a:pPr>
-            <a:r>
-              <a:rPr lang="en-US" sz="1600" b="1" dirty="0">
-                <a:solidFill>
-                  <a:schemeClr val="tx1"/>
-                </a:solidFill>
-                <a:latin typeface="Cambria" pitchFamily="34" charset="0"/>
-                <a:ea typeface="Cambria" pitchFamily="34" charset="-122"/>
-                <a:cs typeface="Cambria" pitchFamily="34" charset="-120"/>
-              </a:rPr>
-              <a:t>Compare prices</a:t>
-            </a:r>
-            <a:endParaRPr lang="en-US" sz="1600" dirty="0"/>
-          </a:p>
-        </p:txBody>
-      </p:sp>
-      <p:sp>
-        <p:nvSpPr>
-          <p:cNvPr id="23" name="Flow text"/>
-          <p:cNvSpPr txBox="1"/>
-          <p:nvPr/>
-        </p:nvSpPr>
-        <p:spPr>
-          <a:xfrm>
-            <a:off x="7296729" y="3867912"/>
-            <a:ext cx="2036003" cy="1554480"/>
-          </a:xfrm>
-          <a:prstGeom prst="rect">
-            <a:avLst/>
-          </a:prstGeom>
-          <a:noFill/>
-          <a:ln/>
-        </p:spPr>
-        <p:txBody>
-          <a:bodyPr wrap="square" lIns="0" tIns="0" rIns="0" bIns="0" rtlCol="0" anchor="t"/>
-          <a:lstStyle/>
-          <a:p>
-            <a:pPr algn="ctr" indent="0" marL="0">
-              <a:buNone/>
-            </a:pPr>
-            <a:r>
-              <a:rPr lang="en-US" sz="1400" dirty="0">
-                <a:solidFill>
-                  <a:schemeClr val="tx2"/>
-                </a:solidFill>
-              </a:rPr>
-              <a:t>Check that the value's slope along the best path is Chapter 6's costate.</a:t>
-            </a:r>
-            <a:endParaRPr lang="en-US" sz="1400" dirty="0"/>
-          </a:p>
-        </p:txBody>
-      </p:sp>
-      <p:sp>
-        <p:nvSpPr>
-          <p:cNvPr id="24" name="Number"/>
-          <p:cNvSpPr/>
-          <p:nvPr/>
-        </p:nvSpPr>
-        <p:spPr>
-          <a:xfrm>
-            <a:off x="10259294" y="2606040"/>
-            <a:ext cx="548640" cy="548640"/>
-          </a:xfrm>
-          <a:prstGeom prst="ellipse">
-            <a:avLst/>
-          </a:prstGeom>
-          <a:solidFill>
-            <a:schemeClr val="accent1"/>
-          </a:solidFill>
-          <a:ln w="6350">
-            <a:solidFill>
-              <a:schemeClr val="accent1"/>
-            </a:solidFill>
-            <a:prstDash val="solid"/>
-          </a:ln>
-        </p:spPr>
-      </p:sp>
-      <p:sp>
-        <p:nvSpPr>
-          <p:cNvPr id="25" name="Text 21"/>
-          <p:cNvSpPr txBox="1"/>
-          <p:nvPr/>
-        </p:nvSpPr>
-        <p:spPr>
-          <a:xfrm>
-            <a:off x="10259294" y="2606040"/>
-            <a:ext cx="548640" cy="548640"/>
-          </a:xfrm>
-          <a:prstGeom prst="rect">
-            <a:avLst/>
-          </a:prstGeom>
-          <a:noFill/>
-          <a:ln/>
-        </p:spPr>
-        <p:txBody>
-          <a:bodyPr wrap="square" lIns="0" tIns="0" rIns="0" bIns="0" rtlCol="0" anchor="ctr"/>
-          <a:lstStyle/>
-          <a:p>
-            <a:pPr algn="ctr" indent="0" marL="0">
-              <a:buNone/>
-            </a:pPr>
-            <a:r>
-              <a:rPr lang="en-US" sz="1600" b="1" dirty="0">
-                <a:solidFill>
-                  <a:schemeClr val="bg1"/>
-                </a:solidFill>
-                <a:latin typeface="Calibri" pitchFamily="34" charset="0"/>
-                <a:ea typeface="Calibri" pitchFamily="34" charset="-122"/>
-                <a:cs typeface="Calibri" pitchFamily="34" charset="-120"/>
-              </a:rPr>
-              <a:t>5</a:t>
-            </a:r>
-            <a:endParaRPr lang="en-US" sz="1600" dirty="0"/>
-          </a:p>
-        </p:txBody>
-      </p:sp>
-      <p:sp>
-        <p:nvSpPr>
-          <p:cNvPr id="26" name="Flow head"/>
-          <p:cNvSpPr txBox="1"/>
-          <p:nvPr/>
-        </p:nvSpPr>
-        <p:spPr>
-          <a:xfrm>
-            <a:off x="9497324" y="3291840"/>
-            <a:ext cx="2072579" cy="548640"/>
-          </a:xfrm>
-          <a:prstGeom prst="rect">
-            <a:avLst/>
-          </a:prstGeom>
-          <a:noFill/>
-          <a:ln/>
-        </p:spPr>
-        <p:txBody>
-          <a:bodyPr wrap="square" lIns="0" tIns="0" rIns="0" bIns="0" rtlCol="0" anchor="t"/>
-          <a:lstStyle/>
-          <a:p>
-            <a:pPr algn="ctr" indent="0" marL="0">
-              <a:buNone/>
-            </a:pPr>
-            <a:r>
-              <a:rPr lang="en-US" sz="1600" b="1" dirty="0">
-                <a:solidFill>
-                  <a:schemeClr val="tx1"/>
-                </a:solidFill>
-                <a:latin typeface="Cambria" pitchFamily="34" charset="0"/>
-                <a:ea typeface="Cambria" pitchFamily="34" charset="-122"/>
-                <a:cs typeface="Cambria" pitchFamily="34" charset="-120"/>
-              </a:rPr>
-              <a:t>Solve on a grid</a:t>
-            </a:r>
-            <a:endParaRPr lang="en-US" sz="1600" dirty="0"/>
-          </a:p>
-        </p:txBody>
-      </p:sp>
-      <p:sp>
-        <p:nvSpPr>
-          <p:cNvPr id="27" name="Flow text"/>
-          <p:cNvSpPr txBox="1"/>
-          <p:nvPr/>
-        </p:nvSpPr>
-        <p:spPr>
-          <a:xfrm>
-            <a:off x="9515612" y="3867912"/>
-            <a:ext cx="2036003" cy="1554480"/>
-          </a:xfrm>
-          <a:prstGeom prst="rect">
-            <a:avLst/>
-          </a:prstGeom>
-          <a:noFill/>
-          <a:ln/>
-        </p:spPr>
-        <p:txBody>
-          <a:bodyPr wrap="square" lIns="0" tIns="0" rIns="0" bIns="0" rtlCol="0" anchor="t"/>
-          <a:lstStyle/>
-          <a:p>
-            <a:pPr algn="ctr" indent="0" marL="0">
-              <a:buNone/>
-            </a:pPr>
-            <a:r>
-              <a:rPr lang="en-US" sz="1400" dirty="0">
-                <a:solidFill>
-                  <a:schemeClr val="tx2"/>
-                </a:solidFill>
-              </a:rPr>
-              <a:t>Upwind scheme and policy iteration, one point to a sixteenth; corners, errors.</a:t>
-            </a:r>
-            <a:endParaRPr lang="en-US" sz="1400" dirty="0"/>
-          </a:p>
-        </p:txBody>
-      </p:sp>
-      <p:sp>
-        <p:nvSpPr>
-          <p:cNvPr id="28" name="Deliverable card"/>
-          <p:cNvSpPr/>
-          <p:nvPr/>
-        </p:nvSpPr>
-        <p:spPr>
-          <a:xfrm>
-            <a:off x="548640" y="5486400"/>
-            <a:ext cx="11094415" cy="685800"/>
+            <a:off x="548640" y="1691640"/>
+            <a:ext cx="3515258" cy="2103120"/>
           </a:xfrm>
           <a:prstGeom prst="roundRect">
             <a:avLst>
-              <a:gd name="adj" fmla="val 10667"/>
+              <a:gd name="adj" fmla="val 3478"/>
             </a:avLst>
           </a:prstGeom>
           <a:solidFill>
@@ -13762,14 +13078,14 @@
       </p:sp>
       <p:sp>
         <p:nvSpPr>
-          <p:cNvPr id="29" name="Deliverable"/>
+          <p:cNvPr id="6" name="Card label"/>
           <p:cNvSpPr txBox="1"/>
           <p:nvPr/>
         </p:nvSpPr>
         <p:spPr>
           <a:xfrm>
-            <a:off x="777240" y="5559552"/>
-            <a:ext cx="10637215" cy="539496"/>
+            <a:off x="731520" y="1819656"/>
+            <a:ext cx="3149498" cy="310896"/>
           </a:xfrm>
           <a:prstGeom prst="rect">
             <a:avLst/>
@@ -13785,22 +13101,779 @@
               <a:buNone/>
             </a:pPr>
             <a:r>
-              <a:rPr lang="en-US" sz="1400" b="1" dirty="0">
+              <a:rPr lang="en-US" sz="1300" b="1" dirty="0">
+                <a:solidFill>
+                  <a:schemeClr val="accent1"/>
+                </a:solidFill>
+              </a:rPr>
+              <a:t>The decision</a:t>
+            </a:r>
+            <a:endParaRPr lang="en-US" sz="1300" dirty="0"/>
+          </a:p>
+        </p:txBody>
+      </p:sp>
+      <p:sp>
+        <p:nvSpPr>
+          <p:cNvPr id="7" name="Card head"/>
+          <p:cNvSpPr txBox="1"/>
+          <p:nvPr/>
+        </p:nvSpPr>
+        <p:spPr>
+          <a:xfrm>
+            <a:off x="731520" y="2148840"/>
+            <a:ext cx="3149498" cy="576072"/>
+          </a:xfrm>
+          <a:prstGeom prst="rect">
+            <a:avLst/>
+          </a:prstGeom>
+          <a:noFill/>
+          <a:ln/>
+        </p:spPr>
+        <p:txBody>
+          <a:bodyPr wrap="square" lIns="0" tIns="0" rIns="0" bIns="0" rtlCol="0" anchor="t"/>
+          <a:lstStyle/>
+          <a:p>
+            <a:pPr indent="0" marL="0">
+              <a:buNone/>
+            </a:pPr>
+            <a:r>
+              <a:rPr lang="en-US" sz="1600" b="1" dirty="0">
                 <a:solidFill>
                   <a:schemeClr val="tx1"/>
                 </a:solidFill>
-              </a:rPr>
-              <a:t>Deliverable:</a:t>
-            </a:r>
-            <a:r>
-              <a:rPr lang="en-US" sz="1400" dirty="0">
+                <a:latin typeface="Cambria" pitchFamily="34" charset="0"/>
+                <a:ea typeface="Cambria" pitchFamily="34" charset="-122"/>
+                <a:cs typeface="Cambria" pitchFamily="34" charset="-120"/>
+              </a:rPr>
+              <a:t>How fast to sell a block</a:t>
+            </a:r>
+            <a:endParaRPr lang="en-US" sz="1600" dirty="0"/>
+          </a:p>
+        </p:txBody>
+      </p:sp>
+      <p:sp>
+        <p:nvSpPr>
+          <p:cNvPr id="8" name="Card text"/>
+          <p:cNvSpPr txBox="1"/>
+          <p:nvPr/>
+        </p:nvSpPr>
+        <p:spPr>
+          <a:xfrm>
+            <a:off x="731520" y="2798064"/>
+            <a:ext cx="3149498" cy="868680"/>
+          </a:xfrm>
+          <a:prstGeom prst="rect">
+            <a:avLst/>
+          </a:prstGeom>
+          <a:noFill/>
+          <a:ln/>
+        </p:spPr>
+        <p:txBody>
+          <a:bodyPr wrap="square" lIns="0" tIns="0" rIns="0" bIns="0" rtlCol="0" anchor="t"/>
+          <a:lstStyle/>
+          <a:p>
+            <a:pPr indent="0" marL="0">
+              <a:buNone/>
+            </a:pPr>
+            <a:r>
+              <a:rPr lang="en-US" sz="1300" dirty="0">
+                <a:solidFill>
+                  <a:schemeClr val="tx2"/>
+                </a:solidFill>
+              </a:rPr>
+              <a:t>Sell fast and push the price down; sell slowly and bear the risk that the price moves.</a:t>
+            </a:r>
+            <a:endParaRPr lang="en-US" sz="1300" dirty="0"/>
+          </a:p>
+        </p:txBody>
+      </p:sp>
+      <p:sp>
+        <p:nvSpPr>
+          <p:cNvPr id="9" name="Card"/>
+          <p:cNvSpPr/>
+          <p:nvPr/>
+        </p:nvSpPr>
+        <p:spPr>
+          <a:xfrm>
+            <a:off x="4338218" y="1691640"/>
+            <a:ext cx="3515258" cy="2103120"/>
+          </a:xfrm>
+          <a:prstGeom prst="roundRect">
+            <a:avLst>
+              <a:gd name="adj" fmla="val 3478"/>
+            </a:avLst>
+          </a:prstGeom>
+          <a:solidFill>
+            <a:schemeClr val="bg2"/>
+          </a:solidFill>
+          <a:ln w="9525">
+            <a:solidFill>
+              <a:srgbClr val="C4CBD8"/>
+            </a:solidFill>
+            <a:prstDash val="solid"/>
+          </a:ln>
+        </p:spPr>
+      </p:sp>
+      <p:sp>
+        <p:nvSpPr>
+          <p:cNvPr id="10" name="Card label"/>
+          <p:cNvSpPr txBox="1"/>
+          <p:nvPr/>
+        </p:nvSpPr>
+        <p:spPr>
+          <a:xfrm>
+            <a:off x="4521098" y="1819656"/>
+            <a:ext cx="3149498" cy="310896"/>
+          </a:xfrm>
+          <a:prstGeom prst="rect">
+            <a:avLst/>
+          </a:prstGeom>
+          <a:noFill/>
+          <a:ln/>
+        </p:spPr>
+        <p:txBody>
+          <a:bodyPr wrap="square" lIns="0" tIns="0" rIns="0" bIns="0" rtlCol="0" anchor="ctr"/>
+          <a:lstStyle/>
+          <a:p>
+            <a:pPr indent="0" marL="0">
+              <a:buNone/>
+            </a:pPr>
+            <a:r>
+              <a:rPr lang="en-US" sz="1300" b="1" dirty="0">
+                <a:solidFill>
+                  <a:schemeClr val="accent1"/>
+                </a:solidFill>
+              </a:rPr>
+              <a:t>The method</a:t>
+            </a:r>
+            <a:endParaRPr lang="en-US" sz="1300" dirty="0"/>
+          </a:p>
+        </p:txBody>
+      </p:sp>
+      <p:sp>
+        <p:nvSpPr>
+          <p:cNvPr id="11" name="Card head"/>
+          <p:cNvSpPr txBox="1"/>
+          <p:nvPr/>
+        </p:nvSpPr>
+        <p:spPr>
+          <a:xfrm>
+            <a:off x="4521098" y="2148840"/>
+            <a:ext cx="3149498" cy="576072"/>
+          </a:xfrm>
+          <a:prstGeom prst="rect">
+            <a:avLst/>
+          </a:prstGeom>
+          <a:noFill/>
+          <a:ln/>
+        </p:spPr>
+        <p:txBody>
+          <a:bodyPr wrap="square" lIns="0" tIns="0" rIns="0" bIns="0" rtlCol="0" anchor="t"/>
+          <a:lstStyle/>
+          <a:p>
+            <a:pPr indent="0" marL="0">
+              <a:buNone/>
+            </a:pPr>
+            <a:r>
+              <a:rPr lang="en-US" sz="1600" b="1" dirty="0">
                 <a:solidFill>
                   <a:schemeClr val="tx1"/>
                 </a:solidFill>
-              </a:rPr>
-              <a:t> a one-page note to the board: the approval rule and its cost, the comparison with Volume I's rules, the value of faster onboarding, the certificate, and the declarations the rule rests on. About 75 minutes.</a:t>
-            </a:r>
-            <a:endParaRPr lang="en-US" sz="1400" dirty="0"/>
+                <a:latin typeface="Cambria" pitchFamily="34" charset="0"/>
+                <a:ea typeface="Cambria" pitchFamily="34" charset="-122"/>
+                <a:cs typeface="Cambria" pitchFamily="34" charset="-120"/>
+              </a:rPr>
+              <a:t>Linear–quadratic, with a deadline</a:t>
+            </a:r>
+            <a:endParaRPr lang="en-US" sz="1600" dirty="0"/>
+          </a:p>
+        </p:txBody>
+      </p:sp>
+      <p:sp>
+        <p:nvSpPr>
+          <p:cNvPr id="12" name="Card text"/>
+          <p:cNvSpPr txBox="1"/>
+          <p:nvPr/>
+        </p:nvSpPr>
+        <p:spPr>
+          <a:xfrm>
+            <a:off x="4521098" y="2798064"/>
+            <a:ext cx="3149498" cy="868680"/>
+          </a:xfrm>
+          <a:prstGeom prst="rect">
+            <a:avLst/>
+          </a:prstGeom>
+          <a:noFill/>
+          <a:ln/>
+        </p:spPr>
+        <p:txBody>
+          <a:bodyPr wrap="square" lIns="0" tIns="0" rIns="0" bIns="0" rtlCol="0" anchor="t"/>
+          <a:lstStyle/>
+          <a:p>
+            <a:pPr indent="0" marL="0">
+              <a:buNone/>
+            </a:pPr>
+            <a:r>
+              <a:rPr lang="en-US" sz="1300" dirty="0">
+                <a:solidFill>
+                  <a:schemeClr val="tx2"/>
+                </a:solidFill>
+              </a:rPr>
+              <a:t>Almgren–Chriss: sell in proportion to what remains, with a gain that rises as the deadline nears.</a:t>
+            </a:r>
+            <a:endParaRPr lang="en-US" sz="1300" dirty="0"/>
+          </a:p>
+        </p:txBody>
+      </p:sp>
+      <p:sp>
+        <p:nvSpPr>
+          <p:cNvPr id="13" name="Card"/>
+          <p:cNvSpPr/>
+          <p:nvPr/>
+        </p:nvSpPr>
+        <p:spPr>
+          <a:xfrm>
+            <a:off x="8127797" y="1691640"/>
+            <a:ext cx="3515258" cy="2103120"/>
+          </a:xfrm>
+          <a:prstGeom prst="roundRect">
+            <a:avLst>
+              <a:gd name="adj" fmla="val 3478"/>
+            </a:avLst>
+          </a:prstGeom>
+          <a:solidFill>
+            <a:schemeClr val="tx1"/>
+          </a:solidFill>
+          <a:ln w="9525">
+            <a:solidFill>
+              <a:srgbClr val="0F1E3D"/>
+            </a:solidFill>
+            <a:prstDash val="solid"/>
+          </a:ln>
+        </p:spPr>
+      </p:sp>
+      <p:sp>
+        <p:nvSpPr>
+          <p:cNvPr id="14" name="Card label"/>
+          <p:cNvSpPr txBox="1"/>
+          <p:nvPr/>
+        </p:nvSpPr>
+        <p:spPr>
+          <a:xfrm>
+            <a:off x="8310677" y="1819656"/>
+            <a:ext cx="3149498" cy="310896"/>
+          </a:xfrm>
+          <a:prstGeom prst="rect">
+            <a:avLst/>
+          </a:prstGeom>
+          <a:noFill/>
+          <a:ln/>
+        </p:spPr>
+        <p:txBody>
+          <a:bodyPr wrap="square" lIns="0" tIns="0" rIns="0" bIns="0" rtlCol="0" anchor="ctr"/>
+          <a:lstStyle/>
+          <a:p>
+            <a:pPr indent="0" marL="0">
+              <a:buNone/>
+            </a:pPr>
+            <a:r>
+              <a:rPr lang="en-US" sz="1300" b="1" dirty="0">
+                <a:solidFill>
+                  <a:schemeClr val="accent1"/>
+                </a:solidFill>
+              </a:rPr>
+              <a:t>The result</a:t>
+            </a:r>
+            <a:endParaRPr lang="en-US" sz="1300" dirty="0"/>
+          </a:p>
+        </p:txBody>
+      </p:sp>
+      <p:sp>
+        <p:nvSpPr>
+          <p:cNvPr id="15" name="Card head"/>
+          <p:cNvSpPr txBox="1"/>
+          <p:nvPr/>
+        </p:nvSpPr>
+        <p:spPr>
+          <a:xfrm>
+            <a:off x="8310677" y="2148840"/>
+            <a:ext cx="3149498" cy="576072"/>
+          </a:xfrm>
+          <a:prstGeom prst="rect">
+            <a:avLst/>
+          </a:prstGeom>
+          <a:noFill/>
+          <a:ln/>
+        </p:spPr>
+        <p:txBody>
+          <a:bodyPr wrap="square" lIns="0" tIns="0" rIns="0" bIns="0" rtlCol="0" anchor="t"/>
+          <a:lstStyle/>
+          <a:p>
+            <a:pPr indent="0" marL="0">
+              <a:buNone/>
+            </a:pPr>
+            <a:r>
+              <a:rPr lang="en-US" sz="1600" b="1" dirty="0">
+                <a:solidFill>
+                  <a:schemeClr val="bg1"/>
+                </a:solidFill>
+                <a:latin typeface="Cambria" pitchFamily="34" charset="0"/>
+                <a:ea typeface="Cambria" pitchFamily="34" charset="-122"/>
+                <a:cs typeface="Cambria" pitchFamily="34" charset="-120"/>
+              </a:rPr>
+              <a:t>A standard of execution</a:t>
+            </a:r>
+            <a:endParaRPr lang="en-US" sz="1600" dirty="0"/>
+          </a:p>
+        </p:txBody>
+      </p:sp>
+      <p:sp>
+        <p:nvSpPr>
+          <p:cNvPr id="16" name="Card text"/>
+          <p:cNvSpPr txBox="1"/>
+          <p:nvPr/>
+        </p:nvSpPr>
+        <p:spPr>
+          <a:xfrm>
+            <a:off x="8310677" y="2798064"/>
+            <a:ext cx="3149498" cy="868680"/>
+          </a:xfrm>
+          <a:prstGeom prst="rect">
+            <a:avLst/>
+          </a:prstGeom>
+          <a:noFill/>
+          <a:ln/>
+        </p:spPr>
+        <p:txBody>
+          <a:bodyPr wrap="square" lIns="0" tIns="0" rIns="0" bIns="0" rtlCol="0" anchor="t"/>
+          <a:lstStyle/>
+          <a:p>
+            <a:pPr indent="0" marL="0">
+              <a:buNone/>
+            </a:pPr>
+            <a:r>
+              <a:rPr lang="en-US" sz="1300" dirty="0">
+                <a:solidFill>
+                  <a:schemeClr val="bg2"/>
+                </a:solidFill>
+              </a:rPr>
+              <a:t>Many brokers offer shortfall-minimizing algorithms; Citigroup estimated impact from 29,509 orders.</a:t>
+            </a:r>
+            <a:endParaRPr lang="en-US" sz="1300" dirty="0"/>
+          </a:p>
+        </p:txBody>
+      </p:sp>
+      <p:sp>
+        <p:nvSpPr>
+          <p:cNvPr id="17" name="Card"/>
+          <p:cNvSpPr/>
+          <p:nvPr/>
+        </p:nvSpPr>
+        <p:spPr>
+          <a:xfrm>
+            <a:off x="548640" y="4069080"/>
+            <a:ext cx="3515258" cy="2103120"/>
+          </a:xfrm>
+          <a:prstGeom prst="roundRect">
+            <a:avLst>
+              <a:gd name="adj" fmla="val 3478"/>
+            </a:avLst>
+          </a:prstGeom>
+          <a:solidFill>
+            <a:schemeClr val="bg2"/>
+          </a:solidFill>
+          <a:ln w="9525">
+            <a:solidFill>
+              <a:srgbClr val="C4CBD8"/>
+            </a:solidFill>
+            <a:prstDash val="solid"/>
+          </a:ln>
+        </p:spPr>
+      </p:sp>
+      <p:sp>
+        <p:nvSpPr>
+          <p:cNvPr id="18" name="Card label"/>
+          <p:cNvSpPr txBox="1"/>
+          <p:nvPr/>
+        </p:nvSpPr>
+        <p:spPr>
+          <a:xfrm>
+            <a:off x="731520" y="4197096"/>
+            <a:ext cx="3149498" cy="310896"/>
+          </a:xfrm>
+          <a:prstGeom prst="rect">
+            <a:avLst/>
+          </a:prstGeom>
+          <a:noFill/>
+          <a:ln/>
+        </p:spPr>
+        <p:txBody>
+          <a:bodyPr wrap="square" lIns="0" tIns="0" rIns="0" bIns="0" rtlCol="0" anchor="ctr"/>
+          <a:lstStyle/>
+          <a:p>
+            <a:pPr indent="0" marL="0">
+              <a:buNone/>
+            </a:pPr>
+            <a:r>
+              <a:rPr lang="en-US" sz="1300" b="1" dirty="0">
+                <a:solidFill>
+                  <a:schemeClr val="accent1"/>
+                </a:solidFill>
+              </a:rPr>
+              <a:t>Making it work</a:t>
+            </a:r>
+            <a:endParaRPr lang="en-US" sz="1300" dirty="0"/>
+          </a:p>
+        </p:txBody>
+      </p:sp>
+      <p:sp>
+        <p:nvSpPr>
+          <p:cNvPr id="19" name="Card head"/>
+          <p:cNvSpPr txBox="1"/>
+          <p:nvPr/>
+        </p:nvSpPr>
+        <p:spPr>
+          <a:xfrm>
+            <a:off x="731520" y="4526280"/>
+            <a:ext cx="3149498" cy="576072"/>
+          </a:xfrm>
+          <a:prstGeom prst="rect">
+            <a:avLst/>
+          </a:prstGeom>
+          <a:noFill/>
+          <a:ln/>
+        </p:spPr>
+        <p:txBody>
+          <a:bodyPr wrap="square" lIns="0" tIns="0" rIns="0" bIns="0" rtlCol="0" anchor="t"/>
+          <a:lstStyle/>
+          <a:p>
+            <a:pPr indent="0" marL="0">
+              <a:buNone/>
+            </a:pPr>
+            <a:r>
+              <a:rPr lang="en-US" sz="1600" b="1" dirty="0">
+                <a:solidFill>
+                  <a:schemeClr val="tx1"/>
+                </a:solidFill>
+                <a:latin typeface="Cambria" pitchFamily="34" charset="0"/>
+                <a:ea typeface="Cambria" pitchFamily="34" charset="-122"/>
+                <a:cs typeface="Cambria" pitchFamily="34" charset="-120"/>
+              </a:rPr>
+              <a:t>Assumptions met the data</a:t>
+            </a:r>
+            <a:endParaRPr lang="en-US" sz="1600" dirty="0"/>
+          </a:p>
+        </p:txBody>
+      </p:sp>
+      <p:sp>
+        <p:nvSpPr>
+          <p:cNvPr id="20" name="Card text"/>
+          <p:cNvSpPr txBox="1"/>
+          <p:nvPr/>
+        </p:nvSpPr>
+        <p:spPr>
+          <a:xfrm>
+            <a:off x="731520" y="5175504"/>
+            <a:ext cx="3149498" cy="868680"/>
+          </a:xfrm>
+          <a:prstGeom prst="rect">
+            <a:avLst/>
+          </a:prstGeom>
+          <a:noFill/>
+          <a:ln/>
+        </p:spPr>
+        <p:txBody>
+          <a:bodyPr wrap="square" lIns="0" tIns="0" rIns="0" bIns="0" rtlCol="0" anchor="t"/>
+          <a:lstStyle/>
+          <a:p>
+            <a:pPr indent="0" marL="0">
+              <a:buNone/>
+            </a:pPr>
+            <a:r>
+              <a:rPr lang="en-US" sz="1300" dirty="0">
+                <a:solidFill>
+                  <a:schemeClr val="tx2"/>
+                </a:solidFill>
+              </a:rPr>
+              <a:t>Impact followed a 3/5 power law, not a straight line, and rules that read prices beat the static schedule.</a:t>
+            </a:r>
+            <a:endParaRPr lang="en-US" sz="1300" dirty="0"/>
+          </a:p>
+        </p:txBody>
+      </p:sp>
+      <p:sp>
+        <p:nvSpPr>
+          <p:cNvPr id="21" name="Card"/>
+          <p:cNvSpPr/>
+          <p:nvPr/>
+        </p:nvSpPr>
+        <p:spPr>
+          <a:xfrm>
+            <a:off x="4338218" y="4069080"/>
+            <a:ext cx="3515258" cy="2103120"/>
+          </a:xfrm>
+          <a:prstGeom prst="roundRect">
+            <a:avLst>
+              <a:gd name="adj" fmla="val 3478"/>
+            </a:avLst>
+          </a:prstGeom>
+          <a:solidFill>
+            <a:schemeClr val="bg2"/>
+          </a:solidFill>
+          <a:ln w="9525">
+            <a:solidFill>
+              <a:srgbClr val="C4CBD8"/>
+            </a:solidFill>
+            <a:prstDash val="solid"/>
+          </a:ln>
+        </p:spPr>
+      </p:sp>
+      <p:sp>
+        <p:nvSpPr>
+          <p:cNvPr id="22" name="Card label"/>
+          <p:cNvSpPr txBox="1"/>
+          <p:nvPr/>
+        </p:nvSpPr>
+        <p:spPr>
+          <a:xfrm>
+            <a:off x="4521098" y="4197096"/>
+            <a:ext cx="3149498" cy="310896"/>
+          </a:xfrm>
+          <a:prstGeom prst="rect">
+            <a:avLst/>
+          </a:prstGeom>
+          <a:noFill/>
+          <a:ln/>
+        </p:spPr>
+        <p:txBody>
+          <a:bodyPr wrap="square" lIns="0" tIns="0" rIns="0" bIns="0" rtlCol="0" anchor="ctr"/>
+          <a:lstStyle/>
+          <a:p>
+            <a:pPr indent="0" marL="0">
+              <a:buNone/>
+            </a:pPr>
+            <a:r>
+              <a:rPr lang="en-US" sz="1300" b="1" dirty="0">
+                <a:solidFill>
+                  <a:schemeClr val="accent1"/>
+                </a:solidFill>
+              </a:rPr>
+              <a:t>What Meridian takes</a:t>
+            </a:r>
+            <a:endParaRPr lang="en-US" sz="1300" dirty="0"/>
+          </a:p>
+        </p:txBody>
+      </p:sp>
+      <p:sp>
+        <p:nvSpPr>
+          <p:cNvPr id="23" name="Card head"/>
+          <p:cNvSpPr txBox="1"/>
+          <p:nvPr/>
+        </p:nvSpPr>
+        <p:spPr>
+          <a:xfrm>
+            <a:off x="4521098" y="4526280"/>
+            <a:ext cx="3149498" cy="576072"/>
+          </a:xfrm>
+          <a:prstGeom prst="rect">
+            <a:avLst/>
+          </a:prstGeom>
+          <a:noFill/>
+          <a:ln/>
+        </p:spPr>
+        <p:txBody>
+          <a:bodyPr wrap="square" lIns="0" tIns="0" rIns="0" bIns="0" rtlCol="0" anchor="t"/>
+          <a:lstStyle/>
+          <a:p>
+            <a:pPr indent="0" marL="0">
+              <a:buNone/>
+            </a:pPr>
+            <a:r>
+              <a:rPr lang="en-US" sz="1600" b="1" dirty="0">
+                <a:solidFill>
+                  <a:schemeClr val="tx1"/>
+                </a:solidFill>
+                <a:latin typeface="Cambria" pitchFamily="34" charset="0"/>
+                <a:ea typeface="Cambria" pitchFamily="34" charset="-122"/>
+                <a:cs typeface="Cambria" pitchFamily="34" charset="-120"/>
+              </a:rPr>
+              <a:t>Worked Example 8.1 with a deadline</a:t>
+            </a:r>
+            <a:endParaRPr lang="en-US" sz="1600" dirty="0"/>
+          </a:p>
+        </p:txBody>
+      </p:sp>
+      <p:sp>
+        <p:nvSpPr>
+          <p:cNvPr id="24" name="Card text"/>
+          <p:cNvSpPr txBox="1"/>
+          <p:nvPr/>
+        </p:nvSpPr>
+        <p:spPr>
+          <a:xfrm>
+            <a:off x="4521098" y="5175504"/>
+            <a:ext cx="3149498" cy="868680"/>
+          </a:xfrm>
+          <a:prstGeom prst="rect">
+            <a:avLst/>
+          </a:prstGeom>
+          <a:noFill/>
+          <a:ln/>
+        </p:spPr>
+        <p:txBody>
+          <a:bodyPr wrap="square" lIns="0" tIns="0" rIns="0" bIns="0" rtlCol="0" anchor="t"/>
+          <a:lstStyle/>
+          <a:p>
+            <a:pPr indent="0" marL="0">
+              <a:buNone/>
+            </a:pPr>
+            <a:r>
+              <a:rPr lang="en-US" sz="1300" dirty="0">
+                <a:solidFill>
+                  <a:schemeClr val="tx2"/>
+                </a:solidFill>
+              </a:rPr>
+              <a:t>A stock that costs its square, closed at a pace that costs its square, gives a linear rule.</a:t>
+            </a:r>
+            <a:endParaRPr lang="en-US" sz="1300" dirty="0"/>
+          </a:p>
+        </p:txBody>
+      </p:sp>
+      <p:sp>
+        <p:nvSpPr>
+          <p:cNvPr id="25" name="Card"/>
+          <p:cNvSpPr/>
+          <p:nvPr/>
+        </p:nvSpPr>
+        <p:spPr>
+          <a:xfrm>
+            <a:off x="8127797" y="4069080"/>
+            <a:ext cx="3515258" cy="2103120"/>
+          </a:xfrm>
+          <a:prstGeom prst="roundRect">
+            <a:avLst>
+              <a:gd name="adj" fmla="val 3478"/>
+            </a:avLst>
+          </a:prstGeom>
+          <a:solidFill>
+            <a:schemeClr val="bg2"/>
+          </a:solidFill>
+          <a:ln w="9525">
+            <a:solidFill>
+              <a:srgbClr val="C4CBD8"/>
+            </a:solidFill>
+            <a:prstDash val="solid"/>
+          </a:ln>
+        </p:spPr>
+      </p:sp>
+      <p:sp>
+        <p:nvSpPr>
+          <p:cNvPr id="26" name="Card label"/>
+          <p:cNvSpPr txBox="1"/>
+          <p:nvPr/>
+        </p:nvSpPr>
+        <p:spPr>
+          <a:xfrm>
+            <a:off x="8310677" y="4197096"/>
+            <a:ext cx="3149498" cy="310896"/>
+          </a:xfrm>
+          <a:prstGeom prst="rect">
+            <a:avLst/>
+          </a:prstGeom>
+          <a:noFill/>
+          <a:ln/>
+        </p:spPr>
+        <p:txBody>
+          <a:bodyPr wrap="square" lIns="0" tIns="0" rIns="0" bIns="0" rtlCol="0" anchor="ctr"/>
+          <a:lstStyle/>
+          <a:p>
+            <a:pPr indent="0" marL="0">
+              <a:buNone/>
+            </a:pPr>
+            <a:r>
+              <a:rPr lang="en-US" sz="1300" b="1" dirty="0">
+                <a:solidFill>
+                  <a:schemeClr val="accent1"/>
+                </a:solidFill>
+              </a:rPr>
+              <a:t>For the board</a:t>
+            </a:r>
+            <a:endParaRPr lang="en-US" sz="1300" dirty="0"/>
+          </a:p>
+        </p:txBody>
+      </p:sp>
+      <p:sp>
+        <p:nvSpPr>
+          <p:cNvPr id="27" name="Card head"/>
+          <p:cNvSpPr txBox="1"/>
+          <p:nvPr/>
+        </p:nvSpPr>
+        <p:spPr>
+          <a:xfrm>
+            <a:off x="8310677" y="4526280"/>
+            <a:ext cx="3149498" cy="576072"/>
+          </a:xfrm>
+          <a:prstGeom prst="rect">
+            <a:avLst/>
+          </a:prstGeom>
+          <a:noFill/>
+          <a:ln/>
+        </p:spPr>
+        <p:txBody>
+          <a:bodyPr wrap="square" lIns="0" tIns="0" rIns="0" bIns="0" rtlCol="0" anchor="t"/>
+          <a:lstStyle/>
+          <a:p>
+            <a:pPr indent="0" marL="0">
+              <a:buNone/>
+            </a:pPr>
+            <a:r>
+              <a:rPr lang="en-US" sz="1600" b="1" dirty="0">
+                <a:solidFill>
+                  <a:schemeClr val="tx1"/>
+                </a:solidFill>
+                <a:latin typeface="Cambria" pitchFamily="34" charset="0"/>
+                <a:ea typeface="Cambria" pitchFamily="34" charset="-122"/>
+                <a:cs typeface="Cambria" pitchFamily="34" charset="-120"/>
+              </a:rPr>
+              <a:t>What does speed cost us?</a:t>
+            </a:r>
+            <a:endParaRPr lang="en-US" sz="1600" dirty="0"/>
+          </a:p>
+        </p:txBody>
+      </p:sp>
+      <p:sp>
+        <p:nvSpPr>
+          <p:cNvPr id="28" name="Card text"/>
+          <p:cNvSpPr txBox="1"/>
+          <p:nvPr/>
+        </p:nvSpPr>
+        <p:spPr>
+          <a:xfrm>
+            <a:off x="8310677" y="5175504"/>
+            <a:ext cx="3149498" cy="868680"/>
+          </a:xfrm>
+          <a:prstGeom prst="rect">
+            <a:avLst/>
+          </a:prstGeom>
+          <a:noFill/>
+          <a:ln/>
+        </p:spPr>
+        <p:txBody>
+          <a:bodyPr wrap="square" lIns="0" tIns="0" rIns="0" bIns="0" rtlCol="0" anchor="t"/>
+          <a:lstStyle/>
+          <a:p>
+            <a:pPr indent="0" marL="0">
+              <a:buNone/>
+            </a:pPr>
+            <a:r>
+              <a:rPr lang="en-US" sz="1300" dirty="0">
+                <a:solidFill>
+                  <a:schemeClr val="tx2"/>
+                </a:solidFill>
+              </a:rPr>
+              <a:t>When we must exit a position, what does waiting risk, and who decides the trade-off?</a:t>
+            </a:r>
+            <a:endParaRPr lang="en-US" sz="1300" dirty="0"/>
           </a:p>
         </p:txBody>
       </p:sp>
@@ -13906,7 +13979,7 @@
                   <a:schemeClr val="accent1"/>
                 </a:solidFill>
               </a:rPr>
-              <a:t>KEY TAKEAWAYS</a:t>
+              <a:t>AXIOM LAB 2.8 · MODULE AXIOM-08</a:t>
             </a:r>
             <a:endParaRPr lang="en-US" sz="1200" dirty="0"/>
           </a:p>
@@ -13947,22 +14020,105 @@
                 <a:ea typeface="Cambria" pitchFamily="34" charset="-122"/>
                 <a:cs typeface="Cambria" pitchFamily="34" charset="-120"/>
               </a:rPr>
-              <a:t>What to carry forward</a:t>
+              <a:t>Steering by the value, in AXIOM</a:t>
             </a:r>
             <a:endParaRPr lang="en-US" sz="3200" dirty="0"/>
           </a:p>
         </p:txBody>
       </p:sp>
-      <p:sp>
-        <p:nvSpPr>
-          <p:cNvPr id="5" name="Number"/>
+      <p:pic>
+        <p:nvPicPr>
+          <p:cNvPr id="5" name="AXIOM logo" descr="AXIOM">    </p:cNvPr>
+          <p:cNvPicPr>
+            <a:picLocks noChangeAspect="1"/>
+          </p:cNvPicPr>
+          <p:nvPr/>
+        </p:nvPicPr>
+        <p:blipFill>
+          <a:blip r:embed="rId1"/>
+          <a:stretch>
+            <a:fillRect/>
+          </a:stretch>
+        </p:blipFill>
+        <p:spPr>
+          <a:xfrm>
+            <a:off x="9539935" y="310896"/>
+            <a:ext cx="2103120" cy="420624"/>
+          </a:xfrm>
+          <a:prstGeom prst="rect">
+            <a:avLst/>
+          </a:prstGeom>
+        </p:spPr>
+      </p:pic>
+      <p:sp>
+        <p:nvSpPr>
+          <p:cNvPr id="6" name="Situation"/>
+          <p:cNvSpPr txBox="1"/>
+          <p:nvPr/>
+        </p:nvSpPr>
+        <p:spPr>
+          <a:xfrm>
+            <a:off x="548640" y="1645920"/>
+            <a:ext cx="11094415" cy="777240"/>
+          </a:xfrm>
+          <a:prstGeom prst="rect">
+            <a:avLst/>
+          </a:prstGeom>
+          <a:noFill/>
+          <a:ln/>
+        </p:spPr>
+        <p:txBody>
+          <a:bodyPr wrap="square" lIns="0" tIns="0" rIns="0" bIns="0" rtlCol="0" anchor="t"/>
+          <a:lstStyle/>
+          <a:p>
+            <a:pPr indent="0" marL="0">
+              <a:buNone/>
+            </a:pPr>
+            <a:r>
+              <a:rPr lang="en-US" sz="1500" dirty="0">
+                <a:solidFill>
+                  <a:schemeClr val="tx1"/>
+                </a:solidFill>
+              </a:rPr>
+              <a:t>Human resources must propose a standing rule for approving hires against the engineering gap, and the board wants a certificate that no other rule does better. Open AXIOM, choose Lab 2.8 and load the Meridian hiring instance and Chapter 6's capability instance.</a:t>
+            </a:r>
+            <a:endParaRPr lang="en-US" sz="1500" dirty="0"/>
+          </a:p>
+        </p:txBody>
+      </p:sp>
+      <p:sp>
+        <p:nvSpPr>
+          <p:cNvPr id="7" name="Flow line"/>
           <p:cNvSpPr/>
           <p:nvPr/>
         </p:nvSpPr>
         <p:spPr>
           <a:xfrm>
-            <a:off x="548640" y="1737360"/>
-            <a:ext cx="566928" cy="566928"/>
+            <a:off x="1658082" y="2880360"/>
+            <a:ext cx="8875532" cy="0"/>
+          </a:xfrm>
+          <a:prstGeom prst="line">
+            <a:avLst/>
+          </a:prstGeom>
+          <a:noFill/>
+          <a:ln w="25400">
+            <a:solidFill>
+              <a:srgbClr val="C4CBD8"/>
+            </a:solidFill>
+            <a:prstDash val="solid"/>
+          </a:ln>
+        </p:spPr>
+      </p:sp>
+      <p:sp>
+        <p:nvSpPr>
+          <p:cNvPr id="8" name="Number"/>
+          <p:cNvSpPr/>
+          <p:nvPr/>
+        </p:nvSpPr>
+        <p:spPr>
+          <a:xfrm>
+            <a:off x="1383762" y="2606040"/>
+            <a:ext cx="548640" cy="548640"/>
           </a:xfrm>
           <a:prstGeom prst="ellipse">
             <a:avLst/>
@@ -13980,14 +14136,14 @@
       </p:sp>
       <p:sp>
         <p:nvSpPr>
-          <p:cNvPr id="6" name="Text 3"/>
+          <p:cNvPr id="9" name="Text 5"/>
           <p:cNvSpPr txBox="1"/>
           <p:nvPr/>
         </p:nvSpPr>
         <p:spPr>
           <a:xfrm>
-            <a:off x="548640" y="1737360"/>
-            <a:ext cx="566928" cy="566928"/>
+            <a:off x="1383762" y="2606040"/>
+            <a:ext cx="548640" cy="548640"/>
           </a:xfrm>
           <a:prstGeom prst="rect">
             <a:avLst/>
@@ -14003,7 +14159,7 @@
               <a:buNone/>
             </a:pPr>
             <a:r>
-              <a:rPr lang="en-US" sz="1500" b="1" dirty="0">
+              <a:rPr lang="en-US" sz="1600" b="1" dirty="0">
                 <a:solidFill>
                   <a:schemeClr val="bg1"/>
                 </a:solidFill>
@@ -14013,20 +14169,20 @@
               </a:rPr>
               <a:t>1</a:t>
             </a:r>
-            <a:endParaRPr lang="en-US" sz="1500" dirty="0"/>
-          </a:p>
-        </p:txBody>
-      </p:sp>
-      <p:sp>
-        <p:nvSpPr>
-          <p:cNvPr id="7" name="Row text"/>
+            <a:endParaRPr lang="en-US" sz="1600" dirty="0"/>
+          </a:p>
+        </p:txBody>
+      </p:sp>
+      <p:sp>
+        <p:nvSpPr>
+          <p:cNvPr id="10" name="Flow head"/>
           <p:cNvSpPr txBox="1"/>
           <p:nvPr/>
         </p:nvSpPr>
         <p:spPr>
           <a:xfrm>
-            <a:off x="1325880" y="1691640"/>
-            <a:ext cx="10317175" cy="841248"/>
+            <a:off x="621792" y="3291840"/>
+            <a:ext cx="2072579" cy="548640"/>
           </a:xfrm>
           <a:prstGeom prst="rect">
             <a:avLst/>
@@ -14035,34 +14191,73 @@
           <a:ln/>
         </p:spPr>
         <p:txBody>
-          <a:bodyPr wrap="square" lIns="0" tIns="0" rIns="0" bIns="0" rtlCol="0" anchor="ctr"/>
-          <a:lstStyle/>
-          <a:p>
-            <a:pPr indent="0" marL="0">
+          <a:bodyPr wrap="square" lIns="0" tIns="0" rIns="0" bIns="0" rtlCol="0" anchor="t"/>
+          <a:lstStyle/>
+          <a:p>
+            <a:pPr algn="ctr" indent="0" marL="0">
               <a:buNone/>
             </a:pPr>
             <a:r>
-              <a:rPr lang="en-US" sz="1500" dirty="0">
+              <a:rPr lang="en-US" sz="1600" b="1" dirty="0">
                 <a:solidFill>
                   <a:schemeClr val="tx1"/>
                 </a:solidFill>
-              </a:rPr>
-              <a:t>The HJB equation is Bellman's equation in continuous time: the hurdle return on a position equals the best of what the next moment earns plus the change in the position's value. Wherever the value has a slope it solves the equation, and along a best plan its slope is Chapter 6's costate.</a:t>
-            </a:r>
-            <a:endParaRPr lang="en-US" sz="1500" dirty="0"/>
-          </a:p>
-        </p:txBody>
-      </p:sp>
-      <p:sp>
-        <p:nvSpPr>
-          <p:cNvPr id="8" name="Number"/>
+                <a:latin typeface="Cambria" pitchFamily="34" charset="0"/>
+                <a:ea typeface="Cambria" pitchFamily="34" charset="-122"/>
+                <a:cs typeface="Cambria" pitchFamily="34" charset="-120"/>
+              </a:rPr>
+              <a:t>Assemble the equation</a:t>
+            </a:r>
+            <a:endParaRPr lang="en-US" sz="1600" dirty="0"/>
+          </a:p>
+        </p:txBody>
+      </p:sp>
+      <p:sp>
+        <p:nvSpPr>
+          <p:cNvPr id="11" name="Flow text"/>
+          <p:cNvSpPr txBox="1"/>
+          <p:nvPr/>
+        </p:nvSpPr>
+        <p:spPr>
+          <a:xfrm>
+            <a:off x="640080" y="3867912"/>
+            <a:ext cx="2036003" cy="1554480"/>
+          </a:xfrm>
+          <a:prstGeom prst="rect">
+            <a:avLst/>
+          </a:prstGeom>
+          <a:noFill/>
+          <a:ln/>
+        </p:spPr>
+        <p:txBody>
+          <a:bodyPr wrap="square" lIns="0" tIns="0" rIns="0" bIns="0" rtlCol="0" anchor="t"/>
+          <a:lstStyle/>
+          <a:p>
+            <a:pPr algn="ctr" indent="0" marL="0">
+              <a:buNone/>
+            </a:pPr>
+            <a:r>
+              <a:rPr lang="en-US" sz="1400" dirty="0">
+                <a:solidFill>
+                  <a:schemeClr val="tx2"/>
+                </a:solidFill>
+              </a:rPr>
+              <a:t>Try quadratic values; map the residual and its bound; find both roots.</a:t>
+            </a:r>
+            <a:endParaRPr lang="en-US" sz="1400" dirty="0"/>
+          </a:p>
+        </p:txBody>
+      </p:sp>
+      <p:sp>
+        <p:nvSpPr>
+          <p:cNvPr id="12" name="Number"/>
           <p:cNvSpPr/>
           <p:nvPr/>
         </p:nvSpPr>
         <p:spPr>
           <a:xfrm>
-            <a:off x="548640" y="2633472"/>
-            <a:ext cx="566928" cy="566928"/>
+            <a:off x="3602645" y="2606040"/>
+            <a:ext cx="548640" cy="548640"/>
           </a:xfrm>
           <a:prstGeom prst="ellipse">
             <a:avLst/>
@@ -14080,14 +14275,14 @@
       </p:sp>
       <p:sp>
         <p:nvSpPr>
-          <p:cNvPr id="9" name="Text 6"/>
+          <p:cNvPr id="13" name="Text 9"/>
           <p:cNvSpPr txBox="1"/>
           <p:nvPr/>
         </p:nvSpPr>
         <p:spPr>
           <a:xfrm>
-            <a:off x="548640" y="2633472"/>
-            <a:ext cx="566928" cy="566928"/>
+            <a:off x="3602645" y="2606040"/>
+            <a:ext cx="548640" cy="548640"/>
           </a:xfrm>
           <a:prstGeom prst="rect">
             <a:avLst/>
@@ -14103,7 +14298,7 @@
               <a:buNone/>
             </a:pPr>
             <a:r>
-              <a:rPr lang="en-US" sz="1500" b="1" dirty="0">
+              <a:rPr lang="en-US" sz="1600" b="1" dirty="0">
                 <a:solidFill>
                   <a:schemeClr val="bg1"/>
                 </a:solidFill>
@@ -14113,20 +14308,20 @@
               </a:rPr>
               <a:t>2</a:t>
             </a:r>
-            <a:endParaRPr lang="en-US" sz="1500" dirty="0"/>
-          </a:p>
-        </p:txBody>
-      </p:sp>
-      <p:sp>
-        <p:nvSpPr>
-          <p:cNvPr id="10" name="Row text"/>
+            <a:endParaRPr lang="en-US" sz="1600" dirty="0"/>
+          </a:p>
+        </p:txBody>
+      </p:sp>
+      <p:sp>
+        <p:nvSpPr>
+          <p:cNvPr id="14" name="Flow head"/>
           <p:cNvSpPr txBox="1"/>
           <p:nvPr/>
         </p:nvSpPr>
         <p:spPr>
           <a:xfrm>
-            <a:off x="1325880" y="2587752"/>
-            <a:ext cx="10317175" cy="841248"/>
+            <a:off x="2840675" y="3291840"/>
+            <a:ext cx="2072579" cy="548640"/>
           </a:xfrm>
           <a:prstGeom prst="rect">
             <a:avLst/>
@@ -14135,34 +14330,73 @@
           <a:ln/>
         </p:spPr>
         <p:txBody>
-          <a:bodyPr wrap="square" lIns="0" tIns="0" rIns="0" bIns="0" rtlCol="0" anchor="ctr"/>
-          <a:lstStyle/>
-          <a:p>
-            <a:pPr indent="0" marL="0">
+          <a:bodyPr wrap="square" lIns="0" tIns="0" rIns="0" bIns="0" rtlCol="0" anchor="t"/>
+          <a:lstStyle/>
+          <a:p>
+            <a:pPr algn="ctr" indent="0" marL="0">
               <a:buNone/>
             </a:pPr>
             <a:r>
-              <a:rPr lang="en-US" sz="1500" dirty="0">
+              <a:rPr lang="en-US" sz="1600" b="1" dirty="0">
                 <a:solidFill>
                   <a:schemeClr val="tx1"/>
                 </a:solidFill>
-              </a:rPr>
-              <a:t>The best rule maximizes the Hamiltonian at the value's slope: at every position, compare a decision's cost with the value of what it builds—at a limit or holding when decisions enter linearly, marginal cost equal to marginal value when they enter smoothly.</a:t>
-            </a:r>
-            <a:endParaRPr lang="en-US" sz="1500" dirty="0"/>
-          </a:p>
-        </p:txBody>
-      </p:sp>
-      <p:sp>
-        <p:nvSpPr>
-          <p:cNvPr id="11" name="Number"/>
+                <a:latin typeface="Cambria" pitchFamily="34" charset="0"/>
+                <a:ea typeface="Cambria" pitchFamily="34" charset="-122"/>
+                <a:cs typeface="Cambria" pitchFamily="34" charset="-120"/>
+              </a:rPr>
+              <a:t>Read the Hamiltonian</a:t>
+            </a:r>
+            <a:endParaRPr lang="en-US" sz="1600" dirty="0"/>
+          </a:p>
+        </p:txBody>
+      </p:sp>
+      <p:sp>
+        <p:nvSpPr>
+          <p:cNvPr id="15" name="Flow text"/>
+          <p:cNvSpPr txBox="1"/>
+          <p:nvPr/>
+        </p:nvSpPr>
+        <p:spPr>
+          <a:xfrm>
+            <a:off x="2858963" y="3867912"/>
+            <a:ext cx="2036003" cy="1554480"/>
+          </a:xfrm>
+          <a:prstGeom prst="rect">
+            <a:avLst/>
+          </a:prstGeom>
+          <a:noFill/>
+          <a:ln/>
+        </p:spPr>
+        <p:txBody>
+          <a:bodyPr wrap="square" lIns="0" tIns="0" rIns="0" bIns="0" rtlCol="0" anchor="t"/>
+          <a:lstStyle/>
+          <a:p>
+            <a:pPr algn="ctr" indent="0" marL="0">
+              <a:buNone/>
+            </a:pPr>
+            <a:r>
+              <a:rPr lang="en-US" sz="1400" dirty="0">
+                <a:solidFill>
+                  <a:schemeClr val="tx2"/>
+                </a:solidFill>
+              </a:rPr>
+              <a:t>Plot it against the approval rate; find where the premium meets the value.</a:t>
+            </a:r>
+            <a:endParaRPr lang="en-US" sz="1400" dirty="0"/>
+          </a:p>
+        </p:txBody>
+      </p:sp>
+      <p:sp>
+        <p:nvSpPr>
+          <p:cNvPr id="16" name="Number"/>
           <p:cNvSpPr/>
           <p:nvPr/>
         </p:nvSpPr>
         <p:spPr>
           <a:xfrm>
-            <a:off x="548640" y="3529584"/>
-            <a:ext cx="566928" cy="566928"/>
+            <a:off x="5821528" y="2606040"/>
+            <a:ext cx="548640" cy="548640"/>
           </a:xfrm>
           <a:prstGeom prst="ellipse">
             <a:avLst/>
@@ -14180,14 +14414,14 @@
       </p:sp>
       <p:sp>
         <p:nvSpPr>
-          <p:cNvPr id="12" name="Text 9"/>
+          <p:cNvPr id="17" name="Text 13"/>
           <p:cNvSpPr txBox="1"/>
           <p:nvPr/>
         </p:nvSpPr>
         <p:spPr>
           <a:xfrm>
-            <a:off x="548640" y="3529584"/>
-            <a:ext cx="566928" cy="566928"/>
+            <a:off x="5821528" y="2606040"/>
+            <a:ext cx="548640" cy="548640"/>
           </a:xfrm>
           <a:prstGeom prst="rect">
             <a:avLst/>
@@ -14203,7 +14437,7 @@
               <a:buNone/>
             </a:pPr>
             <a:r>
-              <a:rPr lang="en-US" sz="1500" b="1" dirty="0">
+              <a:rPr lang="en-US" sz="1600" b="1" dirty="0">
                 <a:solidFill>
                   <a:schemeClr val="bg1"/>
                 </a:solidFill>
@@ -14213,20 +14447,20 @@
               </a:rPr>
               <a:t>3</a:t>
             </a:r>
-            <a:endParaRPr lang="en-US" sz="1500" dirty="0"/>
-          </a:p>
-        </p:txBody>
-      </p:sp>
-      <p:sp>
-        <p:nvSpPr>
-          <p:cNvPr id="13" name="Row text"/>
+            <a:endParaRPr lang="en-US" sz="1600" dirty="0"/>
+          </a:p>
+        </p:txBody>
+      </p:sp>
+      <p:sp>
+        <p:nvSpPr>
+          <p:cNvPr id="18" name="Flow head"/>
           <p:cNvSpPr txBox="1"/>
           <p:nvPr/>
         </p:nvSpPr>
         <p:spPr>
           <a:xfrm>
-            <a:off x="1325880" y="3483864"/>
-            <a:ext cx="10317175" cy="841248"/>
+            <a:off x="5059558" y="3291840"/>
+            <a:ext cx="2072579" cy="548640"/>
           </a:xfrm>
           <a:prstGeom prst="rect">
             <a:avLst/>
@@ -14235,34 +14469,73 @@
           <a:ln/>
         </p:spPr>
         <p:txBody>
-          <a:bodyPr wrap="square" lIns="0" tIns="0" rIns="0" bIns="0" rtlCol="0" anchor="ctr"/>
-          <a:lstStyle/>
-          <a:p>
-            <a:pPr indent="0" marL="0">
+          <a:bodyPr wrap="square" lIns="0" tIns="0" rIns="0" bIns="0" rtlCol="0" anchor="t"/>
+          <a:lstStyle/>
+          <a:p>
+            <a:pPr algn="ctr" indent="0" marL="0">
               <a:buNone/>
             </a:pPr>
             <a:r>
-              <a:rPr lang="en-US" sz="1500" dirty="0">
+              <a:rPr lang="en-US" sz="1600" b="1" dirty="0">
                 <a:solidFill>
                   <a:schemeClr val="tx1"/>
                 </a:solidFill>
-              </a:rPr>
-              <a:t>A function that satisfies the HJB equation, a rule that attains it, and a limit condition at the far end of time certify the rule as best; a residual of ε a year bounds the error by ε/ρ. Value functions have corners; with continuous data the equation holds there in the viscosity sense, and only the value function satisfies it; for one stock, a direct certificate covers an abrupt declaration.</a:t>
-            </a:r>
-            <a:endParaRPr lang="en-US" sz="1500" dirty="0"/>
-          </a:p>
-        </p:txBody>
-      </p:sp>
-      <p:sp>
-        <p:nvSpPr>
-          <p:cNvPr id="14" name="Number"/>
+                <a:latin typeface="Cambria" pitchFamily="34" charset="0"/>
+                <a:ea typeface="Cambria" pitchFamily="34" charset="-122"/>
+                <a:cs typeface="Cambria" pitchFamily="34" charset="-120"/>
+              </a:rPr>
+              <a:t>Generate and simulate rules</a:t>
+            </a:r>
+            <a:endParaRPr lang="en-US" sz="1600" dirty="0"/>
+          </a:p>
+        </p:txBody>
+      </p:sp>
+      <p:sp>
+        <p:nvSpPr>
+          <p:cNvPr id="19" name="Flow text"/>
+          <p:cNvSpPr txBox="1"/>
+          <p:nvPr/>
+        </p:nvSpPr>
+        <p:spPr>
+          <a:xfrm>
+            <a:off x="5077846" y="3867912"/>
+            <a:ext cx="2036003" cy="1554480"/>
+          </a:xfrm>
+          <a:prstGeom prst="rect">
+            <a:avLst/>
+          </a:prstGeom>
+          <a:noFill/>
+          <a:ln/>
+        </p:spPr>
+        <p:txBody>
+          <a:bodyPr wrap="square" lIns="0" tIns="0" rIns="0" bIns="0" rtlCol="0" anchor="t"/>
+          <a:lstStyle/>
+          <a:p>
+            <a:pPr algn="ctr" indent="0" marL="0">
+              <a:buNone/>
+            </a:pPr>
+            <a:r>
+              <a:rPr lang="en-US" sz="1400" dirty="0">
+                <a:solidFill>
+                  <a:schemeClr val="tx2"/>
+                </a:solidFill>
+              </a:rPr>
+              <a:t>With and without the delay, beside Volume I's rules and the predicted gap.</a:t>
+            </a:r>
+            <a:endParaRPr lang="en-US" sz="1400" dirty="0"/>
+          </a:p>
+        </p:txBody>
+      </p:sp>
+      <p:sp>
+        <p:nvSpPr>
+          <p:cNvPr id="20" name="Number"/>
           <p:cNvSpPr/>
           <p:nvPr/>
         </p:nvSpPr>
         <p:spPr>
           <a:xfrm>
-            <a:off x="548640" y="4425696"/>
-            <a:ext cx="566928" cy="566928"/>
+            <a:off x="8040411" y="2606040"/>
+            <a:ext cx="548640" cy="548640"/>
           </a:xfrm>
           <a:prstGeom prst="ellipse">
             <a:avLst/>
@@ -14280,14 +14553,14 @@
       </p:sp>
       <p:sp>
         <p:nvSpPr>
-          <p:cNvPr id="15" name="Text 12"/>
+          <p:cNvPr id="21" name="Text 17"/>
           <p:cNvSpPr txBox="1"/>
           <p:nvPr/>
         </p:nvSpPr>
         <p:spPr>
           <a:xfrm>
-            <a:off x="548640" y="4425696"/>
-            <a:ext cx="566928" cy="566928"/>
+            <a:off x="8040411" y="2606040"/>
+            <a:ext cx="548640" cy="548640"/>
           </a:xfrm>
           <a:prstGeom prst="rect">
             <a:avLst/>
@@ -14303,7 +14576,7 @@
               <a:buNone/>
             </a:pPr>
             <a:r>
-              <a:rPr lang="en-US" sz="1500" b="1" dirty="0">
+              <a:rPr lang="en-US" sz="1600" b="1" dirty="0">
                 <a:solidFill>
                   <a:schemeClr val="bg1"/>
                 </a:solidFill>
@@ -14313,20 +14586,20 @@
               </a:rPr>
               <a:t>4</a:t>
             </a:r>
-            <a:endParaRPr lang="en-US" sz="1500" dirty="0"/>
-          </a:p>
-        </p:txBody>
-      </p:sp>
-      <p:sp>
-        <p:nvSpPr>
-          <p:cNvPr id="16" name="Row text"/>
+            <a:endParaRPr lang="en-US" sz="1600" dirty="0"/>
+          </a:p>
+        </p:txBody>
+      </p:sp>
+      <p:sp>
+        <p:nvSpPr>
+          <p:cNvPr id="22" name="Flow head"/>
           <p:cNvSpPr txBox="1"/>
           <p:nvPr/>
         </p:nvSpPr>
         <p:spPr>
           <a:xfrm>
-            <a:off x="1325880" y="4379976"/>
-            <a:ext cx="10317175" cy="841248"/>
+            <a:off x="7278441" y="3291840"/>
+            <a:ext cx="2072579" cy="548640"/>
           </a:xfrm>
           <a:prstGeom prst="rect">
             <a:avLst/>
@@ -14335,34 +14608,73 @@
           <a:ln/>
         </p:spPr>
         <p:txBody>
-          <a:bodyPr wrap="square" lIns="0" tIns="0" rIns="0" bIns="0" rtlCol="0" anchor="ctr"/>
-          <a:lstStyle/>
-          <a:p>
-            <a:pPr indent="0" marL="0">
+          <a:bodyPr wrap="square" lIns="0" tIns="0" rIns="0" bIns="0" rtlCol="0" anchor="t"/>
+          <a:lstStyle/>
+          <a:p>
+            <a:pPr algn="ctr" indent="0" marL="0">
               <a:buNone/>
             </a:pPr>
             <a:r>
-              <a:rPr lang="en-US" sz="1500" dirty="0">
+              <a:rPr lang="en-US" sz="1600" b="1" dirty="0">
                 <a:solidFill>
                   <a:schemeClr val="tx1"/>
                 </a:solidFill>
-              </a:rPr>
-              <a:t>Linear dynamics with quadratic costs give linear rules from a Riccati equation, found by policy iteration and stable under any stronger gain when decisions act at once. A delay breaks that, and is handled by steering on the predicted state, which counts the decisions in flight.</a:t>
-            </a:r>
-            <a:endParaRPr lang="en-US" sz="1500" dirty="0"/>
-          </a:p>
-        </p:txBody>
-      </p:sp>
-      <p:sp>
-        <p:nvSpPr>
-          <p:cNvPr id="17" name="Number"/>
+                <a:latin typeface="Cambria" pitchFamily="34" charset="0"/>
+                <a:ea typeface="Cambria" pitchFamily="34" charset="-122"/>
+                <a:cs typeface="Cambria" pitchFamily="34" charset="-120"/>
+              </a:rPr>
+              <a:t>Compare prices</a:t>
+            </a:r>
+            <a:endParaRPr lang="en-US" sz="1600" dirty="0"/>
+          </a:p>
+        </p:txBody>
+      </p:sp>
+      <p:sp>
+        <p:nvSpPr>
+          <p:cNvPr id="23" name="Flow text"/>
+          <p:cNvSpPr txBox="1"/>
+          <p:nvPr/>
+        </p:nvSpPr>
+        <p:spPr>
+          <a:xfrm>
+            <a:off x="7296729" y="3867912"/>
+            <a:ext cx="2036003" cy="1554480"/>
+          </a:xfrm>
+          <a:prstGeom prst="rect">
+            <a:avLst/>
+          </a:prstGeom>
+          <a:noFill/>
+          <a:ln/>
+        </p:spPr>
+        <p:txBody>
+          <a:bodyPr wrap="square" lIns="0" tIns="0" rIns="0" bIns="0" rtlCol="0" anchor="t"/>
+          <a:lstStyle/>
+          <a:p>
+            <a:pPr algn="ctr" indent="0" marL="0">
+              <a:buNone/>
+            </a:pPr>
+            <a:r>
+              <a:rPr lang="en-US" sz="1400" dirty="0">
+                <a:solidFill>
+                  <a:schemeClr val="tx2"/>
+                </a:solidFill>
+              </a:rPr>
+              <a:t>Check that the value's slope along the best path is Chapter 6's costate.</a:t>
+            </a:r>
+            <a:endParaRPr lang="en-US" sz="1400" dirty="0"/>
+          </a:p>
+        </p:txBody>
+      </p:sp>
+      <p:sp>
+        <p:nvSpPr>
+          <p:cNvPr id="24" name="Number"/>
           <p:cNvSpPr/>
           <p:nvPr/>
         </p:nvSpPr>
         <p:spPr>
           <a:xfrm>
-            <a:off x="548640" y="5321808"/>
-            <a:ext cx="566928" cy="566928"/>
+            <a:off x="10259294" y="2606040"/>
+            <a:ext cx="548640" cy="548640"/>
           </a:xfrm>
           <a:prstGeom prst="ellipse">
             <a:avLst/>
@@ -14380,14 +14692,14 @@
       </p:sp>
       <p:sp>
         <p:nvSpPr>
-          <p:cNvPr id="18" name="Text 15"/>
+          <p:cNvPr id="25" name="Text 21"/>
           <p:cNvSpPr txBox="1"/>
           <p:nvPr/>
         </p:nvSpPr>
         <p:spPr>
           <a:xfrm>
-            <a:off x="548640" y="5321808"/>
-            <a:ext cx="566928" cy="566928"/>
+            <a:off x="10259294" y="2606040"/>
+            <a:ext cx="548640" cy="548640"/>
           </a:xfrm>
           <a:prstGeom prst="rect">
             <a:avLst/>
@@ -14403,7 +14715,7 @@
               <a:buNone/>
             </a:pPr>
             <a:r>
-              <a:rPr lang="en-US" sz="1500" b="1" dirty="0">
+              <a:rPr lang="en-US" sz="1600" b="1" dirty="0">
                 <a:solidFill>
                   <a:schemeClr val="bg1"/>
                 </a:solidFill>
@@ -14413,20 +14725,20 @@
               </a:rPr>
               <a:t>5</a:t>
             </a:r>
-            <a:endParaRPr lang="en-US" sz="1500" dirty="0"/>
-          </a:p>
-        </p:txBody>
-      </p:sp>
-      <p:sp>
-        <p:nvSpPr>
-          <p:cNvPr id="19" name="Row text"/>
+            <a:endParaRPr lang="en-US" sz="1600" dirty="0"/>
+          </a:p>
+        </p:txBody>
+      </p:sp>
+      <p:sp>
+        <p:nvSpPr>
+          <p:cNvPr id="26" name="Flow head"/>
           <p:cNvSpPr txBox="1"/>
           <p:nvPr/>
         </p:nvSpPr>
         <p:spPr>
           <a:xfrm>
-            <a:off x="1325880" y="5276088"/>
-            <a:ext cx="10317175" cy="841248"/>
+            <a:off x="9497324" y="3291840"/>
+            <a:ext cx="2072579" cy="548640"/>
           </a:xfrm>
           <a:prstGeom prst="rect">
             <a:avLst/>
@@ -14435,6 +14747,108 @@
           <a:ln/>
         </p:spPr>
         <p:txBody>
+          <a:bodyPr wrap="square" lIns="0" tIns="0" rIns="0" bIns="0" rtlCol="0" anchor="t"/>
+          <a:lstStyle/>
+          <a:p>
+            <a:pPr algn="ctr" indent="0" marL="0">
+              <a:buNone/>
+            </a:pPr>
+            <a:r>
+              <a:rPr lang="en-US" sz="1600" b="1" dirty="0">
+                <a:solidFill>
+                  <a:schemeClr val="tx1"/>
+                </a:solidFill>
+                <a:latin typeface="Cambria" pitchFamily="34" charset="0"/>
+                <a:ea typeface="Cambria" pitchFamily="34" charset="-122"/>
+                <a:cs typeface="Cambria" pitchFamily="34" charset="-120"/>
+              </a:rPr>
+              <a:t>Solve on a grid</a:t>
+            </a:r>
+            <a:endParaRPr lang="en-US" sz="1600" dirty="0"/>
+          </a:p>
+        </p:txBody>
+      </p:sp>
+      <p:sp>
+        <p:nvSpPr>
+          <p:cNvPr id="27" name="Flow text"/>
+          <p:cNvSpPr txBox="1"/>
+          <p:nvPr/>
+        </p:nvSpPr>
+        <p:spPr>
+          <a:xfrm>
+            <a:off x="9515612" y="3867912"/>
+            <a:ext cx="2036003" cy="1554480"/>
+          </a:xfrm>
+          <a:prstGeom prst="rect">
+            <a:avLst/>
+          </a:prstGeom>
+          <a:noFill/>
+          <a:ln/>
+        </p:spPr>
+        <p:txBody>
+          <a:bodyPr wrap="square" lIns="0" tIns="0" rIns="0" bIns="0" rtlCol="0" anchor="t"/>
+          <a:lstStyle/>
+          <a:p>
+            <a:pPr algn="ctr" indent="0" marL="0">
+              <a:buNone/>
+            </a:pPr>
+            <a:r>
+              <a:rPr lang="en-US" sz="1400" dirty="0">
+                <a:solidFill>
+                  <a:schemeClr val="tx2"/>
+                </a:solidFill>
+              </a:rPr>
+              <a:t>Upwind scheme and policy iteration, one point to a sixteenth; corners, errors.</a:t>
+            </a:r>
+            <a:endParaRPr lang="en-US" sz="1400" dirty="0"/>
+          </a:p>
+        </p:txBody>
+      </p:sp>
+      <p:sp>
+        <p:nvSpPr>
+          <p:cNvPr id="28" name="Deliverable card"/>
+          <p:cNvSpPr/>
+          <p:nvPr/>
+        </p:nvSpPr>
+        <p:spPr>
+          <a:xfrm>
+            <a:off x="548640" y="5486400"/>
+            <a:ext cx="11094415" cy="685800"/>
+          </a:xfrm>
+          <a:prstGeom prst="roundRect">
+            <a:avLst>
+              <a:gd name="adj" fmla="val 10667"/>
+            </a:avLst>
+          </a:prstGeom>
+          <a:solidFill>
+            <a:schemeClr val="bg2"/>
+          </a:solidFill>
+          <a:ln w="9525">
+            <a:solidFill>
+              <a:srgbClr val="C4CBD8"/>
+            </a:solidFill>
+            <a:prstDash val="solid"/>
+          </a:ln>
+        </p:spPr>
+      </p:sp>
+      <p:sp>
+        <p:nvSpPr>
+          <p:cNvPr id="29" name="Deliverable"/>
+          <p:cNvSpPr txBox="1"/>
+          <p:nvPr/>
+        </p:nvSpPr>
+        <p:spPr>
+          <a:xfrm>
+            <a:off x="777240" y="5559552"/>
+            <a:ext cx="10637215" cy="539496"/>
+          </a:xfrm>
+          <a:prstGeom prst="rect">
+            <a:avLst/>
+          </a:prstGeom>
+          <a:noFill/>
+          <a:ln/>
+        </p:spPr>
+        <p:txBody>
           <a:bodyPr wrap="square" lIns="0" tIns="0" rIns="0" bIns="0" rtlCol="0" anchor="ctr"/>
           <a:lstStyle/>
           <a:p>
@@ -14442,14 +14856,22 @@
               <a:buNone/>
             </a:pPr>
             <a:r>
-              <a:rPr lang="en-US" sz="1500" dirty="0">
+              <a:rPr lang="en-US" sz="1400" b="1" dirty="0">
                 <a:solidFill>
                   <a:schemeClr val="tx1"/>
                 </a:solidFill>
               </a:rPr>
-              <a:t>Upwind schemes are dynamic programs on a grid, solved by policy iteration; with continuous data they converge to the value function, corners included. Grids grow as Gⁿ with the number of stocks, a curse that linear–quadratic problems escape.</a:t>
-            </a:r>
-            <a:endParaRPr lang="en-US" sz="1500" dirty="0"/>
+              <a:t>Deliverable:</a:t>
+            </a:r>
+            <a:r>
+              <a:rPr lang="en-US" sz="1400" dirty="0">
+                <a:solidFill>
+                  <a:schemeClr val="tx1"/>
+                </a:solidFill>
+              </a:rPr>
+              <a:t> a one-page note to the board: the approval rule and its cost, the comparison with Volume I's rules, the value of faster onboarding, the certificate, and the declarations the rule rests on. About 75 minutes.</a:t>
+            </a:r>
+            <a:endParaRPr lang="en-US" sz="1400" dirty="0"/>
           </a:p>
         </p:txBody>
       </p:sp>
@@ -14555,7 +14977,7 @@
                   <a:schemeClr val="accent1"/>
                 </a:solidFill>
               </a:rPr>
-              <a:t>THIS WEEK'S LABORATORY</a:t>
+              <a:t>KEY TAKEAWAYS</a:t>
             </a:r>
             <a:endParaRPr lang="en-US" sz="1200" dirty="0"/>
           </a:p>
@@ -14596,7 +15018,7 @@
                 <a:ea typeface="Cambria" pitchFamily="34" charset="-122"/>
                 <a:cs typeface="Cambria" pitchFamily="34" charset="-120"/>
               </a:rPr>
-              <a:t>Notebook and workbook reproduce the book</a:t>
+              <a:t>What to carry forward</a:t>
             </a:r>
             <a:endParaRPr lang="en-US" sz="3200" dirty="0"/>
           </a:p>
@@ -14604,26 +15026,24 @@
       </p:sp>
       <p:sp>
         <p:nvSpPr>
-          <p:cNvPr id="5" name="Stat card"/>
+          <p:cNvPr id="5" name="Number"/>
           <p:cNvSpPr/>
           <p:nvPr/>
         </p:nvSpPr>
         <p:spPr>
           <a:xfrm>
-            <a:off x="548640" y="1691640"/>
-            <a:ext cx="2567864" cy="1691640"/>
-          </a:xfrm>
-          <a:prstGeom prst="roundRect">
-            <a:avLst>
-              <a:gd name="adj" fmla="val 4324"/>
-            </a:avLst>
+            <a:off x="548640" y="1737360"/>
+            <a:ext cx="566928" cy="566928"/>
+          </a:xfrm>
+          <a:prstGeom prst="ellipse">
+            <a:avLst/>
           </a:prstGeom>
           <a:solidFill>
-            <a:schemeClr val="tx1"/>
+            <a:schemeClr val="accent1"/>
           </a:solidFill>
-          <a:ln w="9525">
+          <a:ln w="6350">
             <a:solidFill>
-              <a:srgbClr val="0F1E3D"/>
+              <a:schemeClr val="accent1"/>
             </a:solidFill>
             <a:prstDash val="solid"/>
           </a:ln>
@@ -14631,14 +15051,14 @@
       </p:sp>
       <p:sp>
         <p:nvSpPr>
-          <p:cNvPr id="6" name="Stat value"/>
+          <p:cNvPr id="6" name="Text 3"/>
           <p:cNvSpPr txBox="1"/>
           <p:nvPr/>
         </p:nvSpPr>
         <p:spPr>
           <a:xfrm>
-            <a:off x="685800" y="1801368"/>
-            <a:ext cx="2293544" cy="914400"/>
+            <a:off x="548640" y="1737360"/>
+            <a:ext cx="566928" cy="566928"/>
           </a:xfrm>
           <a:prstGeom prst="rect">
             <a:avLst/>
@@ -14654,30 +15074,30 @@
               <a:buNone/>
             </a:pPr>
             <a:r>
-              <a:rPr lang="en-US" sz="4400" b="1" dirty="0">
-                <a:solidFill>
-                  <a:schemeClr val="accent1"/>
-                </a:solidFill>
-                <a:latin typeface="Cambria" pitchFamily="34" charset="0"/>
-                <a:ea typeface="Cambria" pitchFamily="34" charset="-122"/>
-                <a:cs typeface="Cambria" pitchFamily="34" charset="-120"/>
-              </a:rPr>
-              <a:t>65</a:t>
-            </a:r>
-            <a:endParaRPr lang="en-US" sz="4400" dirty="0"/>
-          </a:p>
-        </p:txBody>
-      </p:sp>
-      <p:sp>
-        <p:nvSpPr>
-          <p:cNvPr id="7" name="Stat label"/>
+              <a:rPr lang="en-US" sz="1500" b="1" dirty="0">
+                <a:solidFill>
+                  <a:schemeClr val="bg1"/>
+                </a:solidFill>
+                <a:latin typeface="Calibri" pitchFamily="34" charset="0"/>
+                <a:ea typeface="Calibri" pitchFamily="34" charset="-122"/>
+                <a:cs typeface="Calibri" pitchFamily="34" charset="-120"/>
+              </a:rPr>
+              <a:t>1</a:t>
+            </a:r>
+            <a:endParaRPr lang="en-US" sz="1500" dirty="0"/>
+          </a:p>
+        </p:txBody>
+      </p:sp>
+      <p:sp>
+        <p:nvSpPr>
+          <p:cNvPr id="7" name="Row text"/>
           <p:cNvSpPr txBox="1"/>
           <p:nvPr/>
         </p:nvSpPr>
         <p:spPr>
           <a:xfrm>
-            <a:off x="685800" y="2697480"/>
-            <a:ext cx="2293544" cy="612648"/>
+            <a:off x="1325880" y="1691640"/>
+            <a:ext cx="10317175" cy="841248"/>
           </a:xfrm>
           <a:prstGeom prst="rect">
             <a:avLst/>
@@ -14686,46 +15106,44 @@
           <a:ln/>
         </p:spPr>
         <p:txBody>
-          <a:bodyPr wrap="square" lIns="0" tIns="0" rIns="0" bIns="0" rtlCol="0" anchor="t"/>
-          <a:lstStyle/>
-          <a:p>
-            <a:pPr algn="ctr" indent="0" marL="0">
+          <a:bodyPr wrap="square" lIns="0" tIns="0" rIns="0" bIns="0" rtlCol="0" anchor="ctr"/>
+          <a:lstStyle/>
+          <a:p>
+            <a:pPr indent="0" marL="0">
               <a:buNone/>
             </a:pPr>
             <a:r>
-              <a:rPr lang="en-US" sz="1400" dirty="0">
-                <a:solidFill>
-                  <a:schemeClr val="bg2"/>
-                </a:solidFill>
-              </a:rPr>
-              <a:t>notebook checkpoints, every one PASS</a:t>
-            </a:r>
-            <a:endParaRPr lang="en-US" sz="1400" dirty="0"/>
-          </a:p>
-        </p:txBody>
-      </p:sp>
-      <p:sp>
-        <p:nvSpPr>
-          <p:cNvPr id="8" name="Stat card"/>
+              <a:rPr lang="en-US" sz="1500" dirty="0">
+                <a:solidFill>
+                  <a:schemeClr val="tx1"/>
+                </a:solidFill>
+              </a:rPr>
+              <a:t>The HJB equation is Bellman's equation in continuous time: the hurdle return on a position equals the best of what the next moment earns plus the change in the position's value. Wherever the value has a slope it solves the equation, and along a best plan its slope is Chapter 6's costate.</a:t>
+            </a:r>
+            <a:endParaRPr lang="en-US" sz="1500" dirty="0"/>
+          </a:p>
+        </p:txBody>
+      </p:sp>
+      <p:sp>
+        <p:nvSpPr>
+          <p:cNvPr id="8" name="Number"/>
           <p:cNvSpPr/>
           <p:nvPr/>
         </p:nvSpPr>
         <p:spPr>
           <a:xfrm>
-            <a:off x="3390824" y="1691640"/>
-            <a:ext cx="2567864" cy="1691640"/>
-          </a:xfrm>
-          <a:prstGeom prst="roundRect">
-            <a:avLst>
-              <a:gd name="adj" fmla="val 4324"/>
-            </a:avLst>
+            <a:off x="548640" y="2633472"/>
+            <a:ext cx="566928" cy="566928"/>
+          </a:xfrm>
+          <a:prstGeom prst="ellipse">
+            <a:avLst/>
           </a:prstGeom>
           <a:solidFill>
-            <a:schemeClr val="bg2"/>
+            <a:schemeClr val="accent1"/>
           </a:solidFill>
-          <a:ln w="9525">
+          <a:ln w="6350">
             <a:solidFill>
-              <a:srgbClr val="C4CBD8"/>
+              <a:schemeClr val="accent1"/>
             </a:solidFill>
             <a:prstDash val="solid"/>
           </a:ln>
@@ -14733,14 +15151,14 @@
       </p:sp>
       <p:sp>
         <p:nvSpPr>
-          <p:cNvPr id="9" name="Stat value"/>
+          <p:cNvPr id="9" name="Text 6"/>
           <p:cNvSpPr txBox="1"/>
           <p:nvPr/>
         </p:nvSpPr>
         <p:spPr>
           <a:xfrm>
-            <a:off x="3527984" y="1801368"/>
-            <a:ext cx="2293544" cy="914400"/>
+            <a:off x="548640" y="2633472"/>
+            <a:ext cx="566928" cy="566928"/>
           </a:xfrm>
           <a:prstGeom prst="rect">
             <a:avLst/>
@@ -14756,30 +15174,30 @@
               <a:buNone/>
             </a:pPr>
             <a:r>
-              <a:rPr lang="en-US" sz="4400" b="1" dirty="0">
-                <a:solidFill>
-                  <a:schemeClr val="tx1"/>
-                </a:solidFill>
-                <a:latin typeface="Cambria" pitchFamily="34" charset="0"/>
-                <a:ea typeface="Cambria" pitchFamily="34" charset="-122"/>
-                <a:cs typeface="Cambria" pitchFamily="34" charset="-120"/>
-              </a:rPr>
-              <a:t>67</a:t>
-            </a:r>
-            <a:endParaRPr lang="en-US" sz="4400" dirty="0"/>
-          </a:p>
-        </p:txBody>
-      </p:sp>
-      <p:sp>
-        <p:nvSpPr>
-          <p:cNvPr id="10" name="Stat label"/>
+              <a:rPr lang="en-US" sz="1500" b="1" dirty="0">
+                <a:solidFill>
+                  <a:schemeClr val="bg1"/>
+                </a:solidFill>
+                <a:latin typeface="Calibri" pitchFamily="34" charset="0"/>
+                <a:ea typeface="Calibri" pitchFamily="34" charset="-122"/>
+                <a:cs typeface="Calibri" pitchFamily="34" charset="-120"/>
+              </a:rPr>
+              <a:t>2</a:t>
+            </a:r>
+            <a:endParaRPr lang="en-US" sz="1500" dirty="0"/>
+          </a:p>
+        </p:txBody>
+      </p:sp>
+      <p:sp>
+        <p:nvSpPr>
+          <p:cNvPr id="10" name="Row text"/>
           <p:cNvSpPr txBox="1"/>
           <p:nvPr/>
         </p:nvSpPr>
         <p:spPr>
           <a:xfrm>
-            <a:off x="3527984" y="2697480"/>
-            <a:ext cx="2293544" cy="612648"/>
+            <a:off x="1325880" y="2587752"/>
+            <a:ext cx="10317175" cy="841248"/>
           </a:xfrm>
           <a:prstGeom prst="rect">
             <a:avLst/>
@@ -14788,46 +15206,44 @@
           <a:ln/>
         </p:spPr>
         <p:txBody>
-          <a:bodyPr wrap="square" lIns="0" tIns="0" rIns="0" bIns="0" rtlCol="0" anchor="t"/>
-          <a:lstStyle/>
-          <a:p>
-            <a:pPr algn="ctr" indent="0" marL="0">
+          <a:bodyPr wrap="square" lIns="0" tIns="0" rIns="0" bIns="0" rtlCol="0" anchor="ctr"/>
+          <a:lstStyle/>
+          <a:p>
+            <a:pPr indent="0" marL="0">
               <a:buNone/>
             </a:pPr>
             <a:r>
-              <a:rPr lang="en-US" sz="1400" dirty="0">
-                <a:solidFill>
-                  <a:schemeClr val="tx2"/>
-                </a:solidFill>
-              </a:rPr>
-              <a:t>workbook checks against the engine, ALL PASS</a:t>
-            </a:r>
-            <a:endParaRPr lang="en-US" sz="1400" dirty="0"/>
-          </a:p>
-        </p:txBody>
-      </p:sp>
-      <p:sp>
-        <p:nvSpPr>
-          <p:cNvPr id="11" name="Stat card"/>
+              <a:rPr lang="en-US" sz="1500" dirty="0">
+                <a:solidFill>
+                  <a:schemeClr val="tx1"/>
+                </a:solidFill>
+              </a:rPr>
+              <a:t>The best rule maximizes the Hamiltonian at the value's slope: at every position, compare a decision's cost with the value of what it builds—at a limit or holding when decisions enter linearly, marginal cost equal to marginal value when they enter smoothly.</a:t>
+            </a:r>
+            <a:endParaRPr lang="en-US" sz="1500" dirty="0"/>
+          </a:p>
+        </p:txBody>
+      </p:sp>
+      <p:sp>
+        <p:nvSpPr>
+          <p:cNvPr id="11" name="Number"/>
           <p:cNvSpPr/>
           <p:nvPr/>
         </p:nvSpPr>
         <p:spPr>
           <a:xfrm>
-            <a:off x="6233008" y="1691640"/>
-            <a:ext cx="2567864" cy="1691640"/>
-          </a:xfrm>
-          <a:prstGeom prst="roundRect">
-            <a:avLst>
-              <a:gd name="adj" fmla="val 4324"/>
-            </a:avLst>
+            <a:off x="548640" y="3529584"/>
+            <a:ext cx="566928" cy="566928"/>
+          </a:xfrm>
+          <a:prstGeom prst="ellipse">
+            <a:avLst/>
           </a:prstGeom>
           <a:solidFill>
-            <a:schemeClr val="bg2"/>
+            <a:schemeClr val="accent1"/>
           </a:solidFill>
-          <a:ln w="9525">
+          <a:ln w="6350">
             <a:solidFill>
-              <a:srgbClr val="C4CBD8"/>
+              <a:schemeClr val="accent1"/>
             </a:solidFill>
             <a:prstDash val="solid"/>
           </a:ln>
@@ -14835,14 +15251,14 @@
       </p:sp>
       <p:sp>
         <p:nvSpPr>
-          <p:cNvPr id="12" name="Stat value"/>
+          <p:cNvPr id="12" name="Text 9"/>
           <p:cNvSpPr txBox="1"/>
           <p:nvPr/>
         </p:nvSpPr>
         <p:spPr>
           <a:xfrm>
-            <a:off x="6370168" y="1801368"/>
-            <a:ext cx="2293544" cy="914400"/>
+            <a:off x="548640" y="3529584"/>
+            <a:ext cx="566928" cy="566928"/>
           </a:xfrm>
           <a:prstGeom prst="rect">
             <a:avLst/>
@@ -14858,30 +15274,30 @@
               <a:buNone/>
             </a:pPr>
             <a:r>
-              <a:rPr lang="en-US" sz="4400" b="1" dirty="0">
-                <a:solidFill>
-                  <a:schemeClr val="tx1"/>
-                </a:solidFill>
-                <a:latin typeface="Cambria" pitchFamily="34" charset="0"/>
-                <a:ea typeface="Cambria" pitchFamily="34" charset="-122"/>
-                <a:cs typeface="Cambria" pitchFamily="34" charset="-120"/>
-              </a:rPr>
-              <a:t>26208</a:t>
-            </a:r>
-            <a:endParaRPr lang="en-US" sz="4400" dirty="0"/>
-          </a:p>
-        </p:txBody>
-      </p:sp>
-      <p:sp>
-        <p:nvSpPr>
-          <p:cNvPr id="13" name="Stat label"/>
+              <a:rPr lang="en-US" sz="1500" b="1" dirty="0">
+                <a:solidFill>
+                  <a:schemeClr val="bg1"/>
+                </a:solidFill>
+                <a:latin typeface="Calibri" pitchFamily="34" charset="0"/>
+                <a:ea typeface="Calibri" pitchFamily="34" charset="-122"/>
+                <a:cs typeface="Calibri" pitchFamily="34" charset="-120"/>
+              </a:rPr>
+              <a:t>3</a:t>
+            </a:r>
+            <a:endParaRPr lang="en-US" sz="1500" dirty="0"/>
+          </a:p>
+        </p:txBody>
+      </p:sp>
+      <p:sp>
+        <p:nvSpPr>
+          <p:cNvPr id="13" name="Row text"/>
           <p:cNvSpPr txBox="1"/>
           <p:nvPr/>
         </p:nvSpPr>
         <p:spPr>
           <a:xfrm>
-            <a:off x="6370168" y="2697480"/>
-            <a:ext cx="2293544" cy="612648"/>
+            <a:off x="1325880" y="3483864"/>
+            <a:ext cx="10317175" cy="841248"/>
           </a:xfrm>
           <a:prstGeom prst="rect">
             <a:avLst/>
@@ -14890,46 +15306,44 @@
           <a:ln/>
         </p:spPr>
         <p:txBody>
-          <a:bodyPr wrap="square" lIns="0" tIns="0" rIns="0" bIns="0" rtlCol="0" anchor="t"/>
-          <a:lstStyle/>
-          <a:p>
-            <a:pPr algn="ctr" indent="0" marL="0">
+          <a:bodyPr wrap="square" lIns="0" tIns="0" rIns="0" bIns="0" rtlCol="0" anchor="ctr"/>
+          <a:lstStyle/>
+          <a:p>
+            <a:pPr indent="0" marL="0">
               <a:buNone/>
             </a:pPr>
             <a:r>
-              <a:rPr lang="en-US" sz="1400" dirty="0">
-                <a:solidFill>
-                  <a:schemeClr val="tx2"/>
-                </a:solidFill>
-              </a:rPr>
-              <a:t>the lab's seed</a:t>
-            </a:r>
-            <a:endParaRPr lang="en-US" sz="1400" dirty="0"/>
-          </a:p>
-        </p:txBody>
-      </p:sp>
-      <p:sp>
-        <p:nvSpPr>
-          <p:cNvPr id="14" name="Stat card"/>
+              <a:rPr lang="en-US" sz="1500" dirty="0">
+                <a:solidFill>
+                  <a:schemeClr val="tx1"/>
+                </a:solidFill>
+              </a:rPr>
+              <a:t>A function that satisfies the HJB equation, a rule that attains it, and a limit condition at the far end of time certify the rule as best; a residual of ε a year bounds the error by ε/ρ. Value functions have corners; with continuous data the equation holds there in the viscosity sense, and only the value function satisfies it; for one stock, a direct certificate covers an abrupt declaration.</a:t>
+            </a:r>
+            <a:endParaRPr lang="en-US" sz="1500" dirty="0"/>
+          </a:p>
+        </p:txBody>
+      </p:sp>
+      <p:sp>
+        <p:nvSpPr>
+          <p:cNvPr id="14" name="Number"/>
           <p:cNvSpPr/>
           <p:nvPr/>
         </p:nvSpPr>
         <p:spPr>
           <a:xfrm>
-            <a:off x="9075191" y="1691640"/>
-            <a:ext cx="2567864" cy="1691640"/>
-          </a:xfrm>
-          <a:prstGeom prst="roundRect">
-            <a:avLst>
-              <a:gd name="adj" fmla="val 4324"/>
-            </a:avLst>
+            <a:off x="548640" y="4425696"/>
+            <a:ext cx="566928" cy="566928"/>
+          </a:xfrm>
+          <a:prstGeom prst="ellipse">
+            <a:avLst/>
           </a:prstGeom>
           <a:solidFill>
-            <a:schemeClr val="bg2"/>
+            <a:schemeClr val="accent1"/>
           </a:solidFill>
-          <a:ln w="9525">
+          <a:ln w="6350">
             <a:solidFill>
-              <a:srgbClr val="C4CBD8"/>
+              <a:schemeClr val="accent1"/>
             </a:solidFill>
             <a:prstDash val="solid"/>
           </a:ln>
@@ -14937,14 +15351,14 @@
       </p:sp>
       <p:sp>
         <p:nvSpPr>
-          <p:cNvPr id="15" name="Stat value"/>
+          <p:cNvPr id="15" name="Text 12"/>
           <p:cNvSpPr txBox="1"/>
           <p:nvPr/>
         </p:nvSpPr>
         <p:spPr>
           <a:xfrm>
-            <a:off x="9212351" y="1801368"/>
-            <a:ext cx="2293544" cy="914400"/>
+            <a:off x="548640" y="4425696"/>
+            <a:ext cx="566928" cy="566928"/>
           </a:xfrm>
           <a:prstGeom prst="rect">
             <a:avLst/>
@@ -14960,30 +15374,30 @@
               <a:buNone/>
             </a:pPr>
             <a:r>
-              <a:rPr lang="en-US" sz="3000" b="1" dirty="0">
-                <a:solidFill>
-                  <a:schemeClr val="tx1"/>
-                </a:solidFill>
-                <a:latin typeface="Cambria" pitchFamily="34" charset="0"/>
-                <a:ea typeface="Cambria" pitchFamily="34" charset="-122"/>
-                <a:cs typeface="Cambria" pitchFamily="34" charset="-120"/>
-              </a:rPr>
-              <a:t>AXIOM-08</a:t>
-            </a:r>
-            <a:endParaRPr lang="en-US" sz="3000" dirty="0"/>
-          </a:p>
-        </p:txBody>
-      </p:sp>
-      <p:sp>
-        <p:nvSpPr>
-          <p:cNvPr id="16" name="Stat label"/>
+              <a:rPr lang="en-US" sz="1500" b="1" dirty="0">
+                <a:solidFill>
+                  <a:schemeClr val="bg1"/>
+                </a:solidFill>
+                <a:latin typeface="Calibri" pitchFamily="34" charset="0"/>
+                <a:ea typeface="Calibri" pitchFamily="34" charset="-122"/>
+                <a:cs typeface="Calibri" pitchFamily="34" charset="-120"/>
+              </a:rPr>
+              <a:t>4</a:t>
+            </a:r>
+            <a:endParaRPr lang="en-US" sz="1500" dirty="0"/>
+          </a:p>
+        </p:txBody>
+      </p:sp>
+      <p:sp>
+        <p:nvSpPr>
+          <p:cNvPr id="16" name="Row text"/>
           <p:cNvSpPr txBox="1"/>
           <p:nvPr/>
         </p:nvSpPr>
         <p:spPr>
           <a:xfrm>
-            <a:off x="9212351" y="2697480"/>
-            <a:ext cx="2293544" cy="612648"/>
+            <a:off x="1325880" y="4379976"/>
+            <a:ext cx="10317175" cy="841248"/>
           </a:xfrm>
           <a:prstGeom prst="rect">
             <a:avLst/>
@@ -14992,34 +15406,98 @@
           <a:ln/>
         </p:spPr>
         <p:txBody>
-          <a:bodyPr wrap="square" lIns="0" tIns="0" rIns="0" bIns="0" rtlCol="0" anchor="t"/>
+          <a:bodyPr wrap="square" lIns="0" tIns="0" rIns="0" bIns="0" rtlCol="0" anchor="ctr"/>
+          <a:lstStyle/>
+          <a:p>
+            <a:pPr indent="0" marL="0">
+              <a:buNone/>
+            </a:pPr>
+            <a:r>
+              <a:rPr lang="en-US" sz="1500" dirty="0">
+                <a:solidFill>
+                  <a:schemeClr val="tx1"/>
+                </a:solidFill>
+              </a:rPr>
+              <a:t>Linear dynamics with quadratic costs give linear rules from a Riccati equation, found by policy iteration and stable under any stronger gain when decisions act at once. A delay breaks that, and is handled by steering on the predicted state, which counts the decisions in flight.</a:t>
+            </a:r>
+            <a:endParaRPr lang="en-US" sz="1500" dirty="0"/>
+          </a:p>
+        </p:txBody>
+      </p:sp>
+      <p:sp>
+        <p:nvSpPr>
+          <p:cNvPr id="17" name="Number"/>
+          <p:cNvSpPr/>
+          <p:nvPr/>
+        </p:nvSpPr>
+        <p:spPr>
+          <a:xfrm>
+            <a:off x="548640" y="5321808"/>
+            <a:ext cx="566928" cy="566928"/>
+          </a:xfrm>
+          <a:prstGeom prst="ellipse">
+            <a:avLst/>
+          </a:prstGeom>
+          <a:solidFill>
+            <a:schemeClr val="accent1"/>
+          </a:solidFill>
+          <a:ln w="6350">
+            <a:solidFill>
+              <a:schemeClr val="accent1"/>
+            </a:solidFill>
+            <a:prstDash val="solid"/>
+          </a:ln>
+        </p:spPr>
+      </p:sp>
+      <p:sp>
+        <p:nvSpPr>
+          <p:cNvPr id="18" name="Text 15"/>
+          <p:cNvSpPr txBox="1"/>
+          <p:nvPr/>
+        </p:nvSpPr>
+        <p:spPr>
+          <a:xfrm>
+            <a:off x="548640" y="5321808"/>
+            <a:ext cx="566928" cy="566928"/>
+          </a:xfrm>
+          <a:prstGeom prst="rect">
+            <a:avLst/>
+          </a:prstGeom>
+          <a:noFill/>
+          <a:ln/>
+        </p:spPr>
+        <p:txBody>
+          <a:bodyPr wrap="square" lIns="0" tIns="0" rIns="0" bIns="0" rtlCol="0" anchor="ctr"/>
           <a:lstStyle/>
           <a:p>
             <a:pPr algn="ctr" indent="0" marL="0">
               <a:buNone/>
             </a:pPr>
             <a:r>
-              <a:rPr lang="en-US" sz="1400" dirty="0">
-                <a:solidFill>
-                  <a:schemeClr val="tx2"/>
-                </a:solidFill>
-              </a:rPr>
-              <a:t>AXIOM Lab 2.8</a:t>
-            </a:r>
-            <a:endParaRPr lang="en-US" sz="1400" dirty="0"/>
-          </a:p>
-        </p:txBody>
-      </p:sp>
-      <p:sp>
-        <p:nvSpPr>
-          <p:cNvPr id="17" name="Bullets"/>
+              <a:rPr lang="en-US" sz="1500" b="1" dirty="0">
+                <a:solidFill>
+                  <a:schemeClr val="bg1"/>
+                </a:solidFill>
+                <a:latin typeface="Calibri" pitchFamily="34" charset="0"/>
+                <a:ea typeface="Calibri" pitchFamily="34" charset="-122"/>
+                <a:cs typeface="Calibri" pitchFamily="34" charset="-120"/>
+              </a:rPr>
+              <a:t>5</a:t>
+            </a:r>
+            <a:endParaRPr lang="en-US" sz="1500" dirty="0"/>
+          </a:p>
+        </p:txBody>
+      </p:sp>
+      <p:sp>
+        <p:nvSpPr>
+          <p:cNvPr id="19" name="Row text"/>
           <p:cNvSpPr txBox="1"/>
           <p:nvPr/>
         </p:nvSpPr>
         <p:spPr>
           <a:xfrm>
-            <a:off x="548640" y="3703320"/>
-            <a:ext cx="11094415" cy="2468880"/>
+            <a:off x="1325880" y="5276088"/>
+            <a:ext cx="10317175" cy="841248"/>
           </a:xfrm>
           <a:prstGeom prst="rect">
             <a:avLst/>
@@ -15028,77 +15506,21 @@
           <a:ln/>
         </p:spPr>
         <p:txBody>
-          <a:bodyPr wrap="square" lIns="635" tIns="635" rIns="635" bIns="635" rtlCol="0" anchor="t"/>
-          <a:lstStyle/>
-          <a:p>
-            <a:pPr marL="228600" indent="-228600">
-              <a:spcAft>
-                <a:spcPts val="800"/>
-              </a:spcAft>
-              <a:buSzPct val="100000"/>
-              <a:buChar char="•"/>
-            </a:pPr>
-            <a:r>
-              <a:rPr lang="en-US" sz="1700" b="1" dirty="0">
+          <a:bodyPr wrap="square" lIns="0" tIns="0" rIns="0" bIns="0" rtlCol="0" anchor="ctr"/>
+          <a:lstStyle/>
+          <a:p>
+            <a:pPr indent="0" marL="0">
+              <a:buNone/>
+            </a:pPr>
+            <a:r>
+              <a:rPr lang="en-US" sz="1500" dirty="0">
                 <a:solidFill>
                   <a:schemeClr val="tx1"/>
                 </a:solidFill>
               </a:rPr>
-              <a:t>Notebook</a:t>
-            </a:r>
-            <a:r>
-              <a:rPr lang="en-US" sz="1700" dirty="0">
-                <a:solidFill>
-                  <a:schemeClr val="tx1"/>
-                </a:solidFill>
-              </a:rPr>
-              <a:t> DCT_V2_Ch08_Lab.ipynb: Worked Example 8.1 and the lab's five steps in nine panels, ready for Colab</a:t>
-            </a:r>
-            <a:endParaRPr lang="en-US" sz="1700" dirty="0"/>
-          </a:p>
-          <a:p>
-            <a:pPr marL="228600" indent="-228600">
-              <a:spcAft>
-                <a:spcPts val="800"/>
-              </a:spcAft>
-              <a:buSzPct val="100000"/>
-              <a:buChar char="•"/>
-            </a:pPr>
-            <a:r>
-              <a:rPr lang="en-US" sz="1700" b="1" dirty="0">
-                <a:solidFill>
-                  <a:schemeClr val="tx1"/>
-                </a:solidFill>
-              </a:rPr>
-              <a:t>Workbook</a:t>
-            </a:r>
-            <a:r>
-              <a:rPr lang="en-US" sz="1700" dirty="0">
-                <a:solidFill>
-                  <a:schemeClr val="tx1"/>
-                </a:solidFill>
-              </a:rPr>
-              <a:t> DCT_V2_Ch08_Lab.xlsx: the Riccati roots, the predicted-gap rule, policy iteration, the critical gain, Chapter 6's closed forms and the upwind scheme, in formulas</a:t>
-            </a:r>
-            <a:endParaRPr lang="en-US" sz="1700" dirty="0"/>
-          </a:p>
-          <a:p>
-            <a:pPr marL="228600" indent="-228600">
-              <a:spcAft>
-                <a:spcPts val="800"/>
-              </a:spcAft>
-              <a:buSzPct val="100000"/>
-              <a:buChar char="•"/>
-            </a:pPr>
-            <a:r>
-              <a:rPr lang="en-US" sz="1700" dirty="0">
-                <a:solidFill>
-                  <a:schemeClr val="tx1"/>
-                </a:solidFill>
-              </a:rPr>
-              <a:t>Every number on these slides is the book's, and both companions check it</a:t>
-            </a:r>
-            <a:endParaRPr lang="en-US" sz="1700" dirty="0"/>
+              <a:t>Upwind schemes are dynamic programs on a grid, solved by policy iteration; with continuous data they converge to the value function, corners included. Grids grow as Gⁿ with the number of stocks, a curse that linear–quadratic problems escape.</a:t>
+            </a:r>
+            <a:endParaRPr lang="en-US" sz="1500" dirty="0"/>
           </a:p>
         </p:txBody>
       </p:sp>
@@ -15204,6 +15626,655 @@
                   <a:schemeClr val="accent1"/>
                 </a:solidFill>
               </a:rPr>
+              <a:t>THIS WEEK'S LABORATORY</a:t>
+            </a:r>
+            <a:endParaRPr lang="en-US" sz="1200" dirty="0"/>
+          </a:p>
+        </p:txBody>
+      </p:sp>
+      <p:sp>
+        <p:nvSpPr>
+          <p:cNvPr id="4" name="Text 1"/>
+          <p:cNvSpPr/>
+          <p:nvPr>
+            <p:ph idx="103" type="title" hasCustomPrompt="1"/>
+          </p:nvPr>
+        </p:nvSpPr>
+        <p:spPr>
+          <a:xfrm>
+            <a:off x="548640" y="658368"/>
+            <a:ext cx="11094415" cy="868680"/>
+          </a:xfrm>
+          <a:prstGeom prst="rect">
+            <a:avLst/>
+          </a:prstGeom>
+          <a:noFill/>
+          <a:ln/>
+        </p:spPr>
+        <p:txBody>
+          <a:bodyPr wrap="square" lIns="0" tIns="0" rIns="0" bIns="0" rtlCol="0" anchor="t"/>
+          <a:lstStyle/>
+          <a:p>
+            <a:pPr algn="l" indent="0" marL="0">
+              <a:buNone/>
+            </a:pPr>
+            <a:r>
+              <a:rPr lang="en-US" sz="3200" b="1" dirty="0">
+                <a:solidFill>
+                  <a:schemeClr val="tx1"/>
+                </a:solidFill>
+                <a:latin typeface="Cambria" pitchFamily="34" charset="0"/>
+                <a:ea typeface="Cambria" pitchFamily="34" charset="-122"/>
+                <a:cs typeface="Cambria" pitchFamily="34" charset="-120"/>
+              </a:rPr>
+              <a:t>Notebook and workbook reproduce the book</a:t>
+            </a:r>
+            <a:endParaRPr lang="en-US" sz="3200" dirty="0"/>
+          </a:p>
+        </p:txBody>
+      </p:sp>
+      <p:sp>
+        <p:nvSpPr>
+          <p:cNvPr id="5" name="Stat card"/>
+          <p:cNvSpPr/>
+          <p:nvPr/>
+        </p:nvSpPr>
+        <p:spPr>
+          <a:xfrm>
+            <a:off x="548640" y="1691640"/>
+            <a:ext cx="2567864" cy="1691640"/>
+          </a:xfrm>
+          <a:prstGeom prst="roundRect">
+            <a:avLst>
+              <a:gd name="adj" fmla="val 4324"/>
+            </a:avLst>
+          </a:prstGeom>
+          <a:solidFill>
+            <a:schemeClr val="tx1"/>
+          </a:solidFill>
+          <a:ln w="9525">
+            <a:solidFill>
+              <a:srgbClr val="0F1E3D"/>
+            </a:solidFill>
+            <a:prstDash val="solid"/>
+          </a:ln>
+        </p:spPr>
+      </p:sp>
+      <p:sp>
+        <p:nvSpPr>
+          <p:cNvPr id="6" name="Stat value"/>
+          <p:cNvSpPr txBox="1"/>
+          <p:nvPr/>
+        </p:nvSpPr>
+        <p:spPr>
+          <a:xfrm>
+            <a:off x="685800" y="1801368"/>
+            <a:ext cx="2293544" cy="914400"/>
+          </a:xfrm>
+          <a:prstGeom prst="rect">
+            <a:avLst/>
+          </a:prstGeom>
+          <a:noFill/>
+          <a:ln/>
+        </p:spPr>
+        <p:txBody>
+          <a:bodyPr wrap="square" lIns="0" tIns="0" rIns="0" bIns="0" rtlCol="0" anchor="ctr"/>
+          <a:lstStyle/>
+          <a:p>
+            <a:pPr algn="ctr" indent="0" marL="0">
+              <a:buNone/>
+            </a:pPr>
+            <a:r>
+              <a:rPr lang="en-US" sz="4400" b="1" dirty="0">
+                <a:solidFill>
+                  <a:schemeClr val="accent1"/>
+                </a:solidFill>
+                <a:latin typeface="Cambria" pitchFamily="34" charset="0"/>
+                <a:ea typeface="Cambria" pitchFamily="34" charset="-122"/>
+                <a:cs typeface="Cambria" pitchFamily="34" charset="-120"/>
+              </a:rPr>
+              <a:t>65</a:t>
+            </a:r>
+            <a:endParaRPr lang="en-US" sz="4400" dirty="0"/>
+          </a:p>
+        </p:txBody>
+      </p:sp>
+      <p:sp>
+        <p:nvSpPr>
+          <p:cNvPr id="7" name="Stat label"/>
+          <p:cNvSpPr txBox="1"/>
+          <p:nvPr/>
+        </p:nvSpPr>
+        <p:spPr>
+          <a:xfrm>
+            <a:off x="685800" y="2697480"/>
+            <a:ext cx="2293544" cy="612648"/>
+          </a:xfrm>
+          <a:prstGeom prst="rect">
+            <a:avLst/>
+          </a:prstGeom>
+          <a:noFill/>
+          <a:ln/>
+        </p:spPr>
+        <p:txBody>
+          <a:bodyPr wrap="square" lIns="0" tIns="0" rIns="0" bIns="0" rtlCol="0" anchor="t"/>
+          <a:lstStyle/>
+          <a:p>
+            <a:pPr algn="ctr" indent="0" marL="0">
+              <a:buNone/>
+            </a:pPr>
+            <a:r>
+              <a:rPr lang="en-US" sz="1400" dirty="0">
+                <a:solidFill>
+                  <a:schemeClr val="bg2"/>
+                </a:solidFill>
+              </a:rPr>
+              <a:t>notebook checkpoints, every one PASS</a:t>
+            </a:r>
+            <a:endParaRPr lang="en-US" sz="1400" dirty="0"/>
+          </a:p>
+        </p:txBody>
+      </p:sp>
+      <p:sp>
+        <p:nvSpPr>
+          <p:cNvPr id="8" name="Stat card"/>
+          <p:cNvSpPr/>
+          <p:nvPr/>
+        </p:nvSpPr>
+        <p:spPr>
+          <a:xfrm>
+            <a:off x="3390824" y="1691640"/>
+            <a:ext cx="2567864" cy="1691640"/>
+          </a:xfrm>
+          <a:prstGeom prst="roundRect">
+            <a:avLst>
+              <a:gd name="adj" fmla="val 4324"/>
+            </a:avLst>
+          </a:prstGeom>
+          <a:solidFill>
+            <a:schemeClr val="bg2"/>
+          </a:solidFill>
+          <a:ln w="9525">
+            <a:solidFill>
+              <a:srgbClr val="C4CBD8"/>
+            </a:solidFill>
+            <a:prstDash val="solid"/>
+          </a:ln>
+        </p:spPr>
+      </p:sp>
+      <p:sp>
+        <p:nvSpPr>
+          <p:cNvPr id="9" name="Stat value"/>
+          <p:cNvSpPr txBox="1"/>
+          <p:nvPr/>
+        </p:nvSpPr>
+        <p:spPr>
+          <a:xfrm>
+            <a:off x="3527984" y="1801368"/>
+            <a:ext cx="2293544" cy="914400"/>
+          </a:xfrm>
+          <a:prstGeom prst="rect">
+            <a:avLst/>
+          </a:prstGeom>
+          <a:noFill/>
+          <a:ln/>
+        </p:spPr>
+        <p:txBody>
+          <a:bodyPr wrap="square" lIns="0" tIns="0" rIns="0" bIns="0" rtlCol="0" anchor="ctr"/>
+          <a:lstStyle/>
+          <a:p>
+            <a:pPr algn="ctr" indent="0" marL="0">
+              <a:buNone/>
+            </a:pPr>
+            <a:r>
+              <a:rPr lang="en-US" sz="4400" b="1" dirty="0">
+                <a:solidFill>
+                  <a:schemeClr val="tx1"/>
+                </a:solidFill>
+                <a:latin typeface="Cambria" pitchFamily="34" charset="0"/>
+                <a:ea typeface="Cambria" pitchFamily="34" charset="-122"/>
+                <a:cs typeface="Cambria" pitchFamily="34" charset="-120"/>
+              </a:rPr>
+              <a:t>67</a:t>
+            </a:r>
+            <a:endParaRPr lang="en-US" sz="4400" dirty="0"/>
+          </a:p>
+        </p:txBody>
+      </p:sp>
+      <p:sp>
+        <p:nvSpPr>
+          <p:cNvPr id="10" name="Stat label"/>
+          <p:cNvSpPr txBox="1"/>
+          <p:nvPr/>
+        </p:nvSpPr>
+        <p:spPr>
+          <a:xfrm>
+            <a:off x="3527984" y="2697480"/>
+            <a:ext cx="2293544" cy="612648"/>
+          </a:xfrm>
+          <a:prstGeom prst="rect">
+            <a:avLst/>
+          </a:prstGeom>
+          <a:noFill/>
+          <a:ln/>
+        </p:spPr>
+        <p:txBody>
+          <a:bodyPr wrap="square" lIns="0" tIns="0" rIns="0" bIns="0" rtlCol="0" anchor="t"/>
+          <a:lstStyle/>
+          <a:p>
+            <a:pPr algn="ctr" indent="0" marL="0">
+              <a:buNone/>
+            </a:pPr>
+            <a:r>
+              <a:rPr lang="en-US" sz="1400" dirty="0">
+                <a:solidFill>
+                  <a:schemeClr val="tx2"/>
+                </a:solidFill>
+              </a:rPr>
+              <a:t>workbook checks against the engine, ALL PASS</a:t>
+            </a:r>
+            <a:endParaRPr lang="en-US" sz="1400" dirty="0"/>
+          </a:p>
+        </p:txBody>
+      </p:sp>
+      <p:sp>
+        <p:nvSpPr>
+          <p:cNvPr id="11" name="Stat card"/>
+          <p:cNvSpPr/>
+          <p:nvPr/>
+        </p:nvSpPr>
+        <p:spPr>
+          <a:xfrm>
+            <a:off x="6233008" y="1691640"/>
+            <a:ext cx="2567864" cy="1691640"/>
+          </a:xfrm>
+          <a:prstGeom prst="roundRect">
+            <a:avLst>
+              <a:gd name="adj" fmla="val 4324"/>
+            </a:avLst>
+          </a:prstGeom>
+          <a:solidFill>
+            <a:schemeClr val="bg2"/>
+          </a:solidFill>
+          <a:ln w="9525">
+            <a:solidFill>
+              <a:srgbClr val="C4CBD8"/>
+            </a:solidFill>
+            <a:prstDash val="solid"/>
+          </a:ln>
+        </p:spPr>
+      </p:sp>
+      <p:sp>
+        <p:nvSpPr>
+          <p:cNvPr id="12" name="Stat value"/>
+          <p:cNvSpPr txBox="1"/>
+          <p:nvPr/>
+        </p:nvSpPr>
+        <p:spPr>
+          <a:xfrm>
+            <a:off x="6370168" y="1801368"/>
+            <a:ext cx="2293544" cy="914400"/>
+          </a:xfrm>
+          <a:prstGeom prst="rect">
+            <a:avLst/>
+          </a:prstGeom>
+          <a:noFill/>
+          <a:ln/>
+        </p:spPr>
+        <p:txBody>
+          <a:bodyPr wrap="square" lIns="0" tIns="0" rIns="0" bIns="0" rtlCol="0" anchor="ctr"/>
+          <a:lstStyle/>
+          <a:p>
+            <a:pPr algn="ctr" indent="0" marL="0">
+              <a:buNone/>
+            </a:pPr>
+            <a:r>
+              <a:rPr lang="en-US" sz="4400" b="1" dirty="0">
+                <a:solidFill>
+                  <a:schemeClr val="tx1"/>
+                </a:solidFill>
+                <a:latin typeface="Cambria" pitchFamily="34" charset="0"/>
+                <a:ea typeface="Cambria" pitchFamily="34" charset="-122"/>
+                <a:cs typeface="Cambria" pitchFamily="34" charset="-120"/>
+              </a:rPr>
+              <a:t>26208</a:t>
+            </a:r>
+            <a:endParaRPr lang="en-US" sz="4400" dirty="0"/>
+          </a:p>
+        </p:txBody>
+      </p:sp>
+      <p:sp>
+        <p:nvSpPr>
+          <p:cNvPr id="13" name="Stat label"/>
+          <p:cNvSpPr txBox="1"/>
+          <p:nvPr/>
+        </p:nvSpPr>
+        <p:spPr>
+          <a:xfrm>
+            <a:off x="6370168" y="2697480"/>
+            <a:ext cx="2293544" cy="612648"/>
+          </a:xfrm>
+          <a:prstGeom prst="rect">
+            <a:avLst/>
+          </a:prstGeom>
+          <a:noFill/>
+          <a:ln/>
+        </p:spPr>
+        <p:txBody>
+          <a:bodyPr wrap="square" lIns="0" tIns="0" rIns="0" bIns="0" rtlCol="0" anchor="t"/>
+          <a:lstStyle/>
+          <a:p>
+            <a:pPr algn="ctr" indent="0" marL="0">
+              <a:buNone/>
+            </a:pPr>
+            <a:r>
+              <a:rPr lang="en-US" sz="1400" dirty="0">
+                <a:solidFill>
+                  <a:schemeClr val="tx2"/>
+                </a:solidFill>
+              </a:rPr>
+              <a:t>the lab's seed</a:t>
+            </a:r>
+            <a:endParaRPr lang="en-US" sz="1400" dirty="0"/>
+          </a:p>
+        </p:txBody>
+      </p:sp>
+      <p:sp>
+        <p:nvSpPr>
+          <p:cNvPr id="14" name="Stat card"/>
+          <p:cNvSpPr/>
+          <p:nvPr/>
+        </p:nvSpPr>
+        <p:spPr>
+          <a:xfrm>
+            <a:off x="9075191" y="1691640"/>
+            <a:ext cx="2567864" cy="1691640"/>
+          </a:xfrm>
+          <a:prstGeom prst="roundRect">
+            <a:avLst>
+              <a:gd name="adj" fmla="val 4324"/>
+            </a:avLst>
+          </a:prstGeom>
+          <a:solidFill>
+            <a:schemeClr val="bg2"/>
+          </a:solidFill>
+          <a:ln w="9525">
+            <a:solidFill>
+              <a:srgbClr val="C4CBD8"/>
+            </a:solidFill>
+            <a:prstDash val="solid"/>
+          </a:ln>
+        </p:spPr>
+      </p:sp>
+      <p:sp>
+        <p:nvSpPr>
+          <p:cNvPr id="15" name="Stat value"/>
+          <p:cNvSpPr txBox="1"/>
+          <p:nvPr/>
+        </p:nvSpPr>
+        <p:spPr>
+          <a:xfrm>
+            <a:off x="9212351" y="1801368"/>
+            <a:ext cx="2293544" cy="914400"/>
+          </a:xfrm>
+          <a:prstGeom prst="rect">
+            <a:avLst/>
+          </a:prstGeom>
+          <a:noFill/>
+          <a:ln/>
+        </p:spPr>
+        <p:txBody>
+          <a:bodyPr wrap="square" lIns="0" tIns="0" rIns="0" bIns="0" rtlCol="0" anchor="ctr"/>
+          <a:lstStyle/>
+          <a:p>
+            <a:pPr algn="ctr" indent="0" marL="0">
+              <a:buNone/>
+            </a:pPr>
+            <a:r>
+              <a:rPr lang="en-US" sz="3000" b="1" dirty="0">
+                <a:solidFill>
+                  <a:schemeClr val="tx1"/>
+                </a:solidFill>
+                <a:latin typeface="Cambria" pitchFamily="34" charset="0"/>
+                <a:ea typeface="Cambria" pitchFamily="34" charset="-122"/>
+                <a:cs typeface="Cambria" pitchFamily="34" charset="-120"/>
+              </a:rPr>
+              <a:t>AXIOM-08</a:t>
+            </a:r>
+            <a:endParaRPr lang="en-US" sz="3000" dirty="0"/>
+          </a:p>
+        </p:txBody>
+      </p:sp>
+      <p:sp>
+        <p:nvSpPr>
+          <p:cNvPr id="16" name="Stat label"/>
+          <p:cNvSpPr txBox="1"/>
+          <p:nvPr/>
+        </p:nvSpPr>
+        <p:spPr>
+          <a:xfrm>
+            <a:off x="9212351" y="2697480"/>
+            <a:ext cx="2293544" cy="612648"/>
+          </a:xfrm>
+          <a:prstGeom prst="rect">
+            <a:avLst/>
+          </a:prstGeom>
+          <a:noFill/>
+          <a:ln/>
+        </p:spPr>
+        <p:txBody>
+          <a:bodyPr wrap="square" lIns="0" tIns="0" rIns="0" bIns="0" rtlCol="0" anchor="t"/>
+          <a:lstStyle/>
+          <a:p>
+            <a:pPr algn="ctr" indent="0" marL="0">
+              <a:buNone/>
+            </a:pPr>
+            <a:r>
+              <a:rPr lang="en-US" sz="1400" dirty="0">
+                <a:solidFill>
+                  <a:schemeClr val="tx2"/>
+                </a:solidFill>
+              </a:rPr>
+              <a:t>AXIOM Lab 2.8</a:t>
+            </a:r>
+            <a:endParaRPr lang="en-US" sz="1400" dirty="0"/>
+          </a:p>
+        </p:txBody>
+      </p:sp>
+      <p:sp>
+        <p:nvSpPr>
+          <p:cNvPr id="17" name="Bullets"/>
+          <p:cNvSpPr txBox="1"/>
+          <p:nvPr/>
+        </p:nvSpPr>
+        <p:spPr>
+          <a:xfrm>
+            <a:off x="548640" y="3703320"/>
+            <a:ext cx="11094415" cy="2468880"/>
+          </a:xfrm>
+          <a:prstGeom prst="rect">
+            <a:avLst/>
+          </a:prstGeom>
+          <a:noFill/>
+          <a:ln/>
+        </p:spPr>
+        <p:txBody>
+          <a:bodyPr wrap="square" lIns="635" tIns="635" rIns="635" bIns="635" rtlCol="0" anchor="t"/>
+          <a:lstStyle/>
+          <a:p>
+            <a:pPr marL="228600" indent="-228600">
+              <a:spcAft>
+                <a:spcPts val="800"/>
+              </a:spcAft>
+              <a:buSzPct val="100000"/>
+              <a:buChar char="•"/>
+            </a:pPr>
+            <a:r>
+              <a:rPr lang="en-US" sz="1700" b="1" dirty="0">
+                <a:solidFill>
+                  <a:schemeClr val="tx1"/>
+                </a:solidFill>
+              </a:rPr>
+              <a:t>Notebook</a:t>
+            </a:r>
+            <a:r>
+              <a:rPr lang="en-US" sz="1700" dirty="0">
+                <a:solidFill>
+                  <a:schemeClr val="tx1"/>
+                </a:solidFill>
+              </a:rPr>
+              <a:t> DCT_V2_Ch08_Lab.ipynb: Worked Example 8.1 and the lab's five steps in nine panels, ready for Colab</a:t>
+            </a:r>
+            <a:endParaRPr lang="en-US" sz="1700" dirty="0"/>
+          </a:p>
+          <a:p>
+            <a:pPr marL="228600" indent="-228600">
+              <a:spcAft>
+                <a:spcPts val="800"/>
+              </a:spcAft>
+              <a:buSzPct val="100000"/>
+              <a:buChar char="•"/>
+            </a:pPr>
+            <a:r>
+              <a:rPr lang="en-US" sz="1700" b="1" dirty="0">
+                <a:solidFill>
+                  <a:schemeClr val="tx1"/>
+                </a:solidFill>
+              </a:rPr>
+              <a:t>Workbook</a:t>
+            </a:r>
+            <a:r>
+              <a:rPr lang="en-US" sz="1700" dirty="0">
+                <a:solidFill>
+                  <a:schemeClr val="tx1"/>
+                </a:solidFill>
+              </a:rPr>
+              <a:t> DCT_V2_Ch08_Lab.xlsx: the Riccati roots, the predicted-gap rule, policy iteration, the critical gain, Chapter 6's closed forms and the upwind scheme, in formulas</a:t>
+            </a:r>
+            <a:endParaRPr lang="en-US" sz="1700" dirty="0"/>
+          </a:p>
+          <a:p>
+            <a:pPr marL="228600" indent="-228600">
+              <a:spcAft>
+                <a:spcPts val="800"/>
+              </a:spcAft>
+              <a:buSzPct val="100000"/>
+              <a:buChar char="•"/>
+            </a:pPr>
+            <a:r>
+              <a:rPr lang="en-US" sz="1700" dirty="0">
+                <a:solidFill>
+                  <a:schemeClr val="tx1"/>
+                </a:solidFill>
+              </a:rPr>
+              <a:t>Every number on these slides is the book's, and both companions check it</a:t>
+            </a:r>
+            <a:endParaRPr lang="en-US" sz="1700" dirty="0"/>
+          </a:p>
+        </p:txBody>
+      </p:sp>
+      <p:sp>
+        <p:nvSpPr>
+          <p:cNvPr id="25" name="Slide Number Placeholder 0"/>
+          <p:cNvSpPr>
+            <a:spLocks noGrp="1"/>
+          </p:cNvSpPr>
+          <p:nvPr>
+            <p:ph type="sldNum" sz="quarter" idx="4294967295"/>
+          </p:nvPr>
+        </p:nvSpPr>
+        <p:spPr>
+          <a:xfrm>
+            <a:off x="11094415" y="6382512"/>
+            <a:ext cx="548640" cy="237744"/>
+          </a:xfrm>
+          <a:prstGeom prst="rect">
+            <a:avLst/>
+          </a:prstGeom>
+          <a:extLst>
+            <a:ext uri="{C572A759-6A51-4108-AA02-DFA0A04FC94B}">
+              <ma14:wrappingTextBoxFlag xmlns:ma14="http://schemas.microsoft.com/office/mac/drawingml/2011/main" val="0"/>
+            </a:ext>
+          </a:extLst>
+        </p:spPr>
+        <p:txBody>
+          <a:bodyPr/>
+          <a:lstStyle>
+            <a:lvl1pPr>
+              <a:defRPr sz="1000">
+                <a:solidFill>
+                  <a:srgbClr val="5A6B82"/>
+                </a:solidFill>
+              </a:defRPr>
+            </a:lvl1pPr>
+          </a:lstStyle>
+          <a:p>
+            <a:pPr algn="r"/>
+            <a:fld id="{F7021451-1387-4CA6-816F-3879F97B5CBC}" type="slidenum">
+              <a:rPr b="0" lang="en-US"/>
+              <a:t>23</a:t>
+            </a:fld>
+            <a:endParaRPr lang="en-US"/>
+          </a:p>
+        </p:txBody>
+      </p:sp>
+    </p:spTree>
+  </p:cSld>
+  <p:clrMapOvr>
+    <a:masterClrMapping/>
+  </p:clrMapOvr>
+</p:sld>
+</file>
+
+<file path=ppt/slides/slide24.xml><?xml version="1.0" encoding="utf-8"?>
+<p:sld xmlns:a="http://schemas.openxmlformats.org/drawingml/2006/main" xmlns:r="http://schemas.openxmlformats.org/officeDocument/2006/relationships" xmlns:p="http://schemas.openxmlformats.org/presentationml/2006/main">
+  <p:cSld name="Slide 24">
+    <p:spTree>
+      <p:nvGrpSpPr>
+        <p:cNvPr id="1" name=""/>
+        <p:cNvGrpSpPr/>
+        <p:nvPr/>
+      </p:nvGrpSpPr>
+      <p:grpSpPr>
+        <a:xfrm>
+          <a:off x="0" y="0"/>
+          <a:ext cx="0" cy="0"/>
+          <a:chOff x="0" y="0"/>
+          <a:chExt cx="0" cy="0"/>
+        </a:xfrm>
+      </p:grpSpPr>
+      <p:sp>
+        <p:nvSpPr>
+          <p:cNvPr id="3" name="Text 1"/>
+          <p:cNvSpPr/>
+          <p:nvPr>
+            <p:ph idx="102" type="body" hasCustomPrompt="1"/>
+          </p:nvPr>
+        </p:nvSpPr>
+        <p:spPr>
+          <a:xfrm>
+            <a:off x="548640" y="347472"/>
+            <a:ext cx="11094415" cy="292608"/>
+          </a:xfrm>
+          <a:prstGeom prst="rect">
+            <a:avLst/>
+          </a:prstGeom>
+          <a:noFill/>
+          <a:ln/>
+        </p:spPr>
+        <p:txBody>
+          <a:bodyPr wrap="square" lIns="0" tIns="0" rIns="0" bIns="0" rtlCol="0"/>
+          <a:lstStyle/>
+          <a:p>
+            <a:pPr indent="0" marL="0">
+              <a:buNone/>
+            </a:pPr>
+            <a:r>
+              <a:rPr lang="en-US" sz="1200" b="1" spc="200" kern="0" dirty="0">
+                <a:solidFill>
+                  <a:schemeClr val="accent1"/>
+                </a:solidFill>
+              </a:rPr>
               <a:t>NEXT · CHAPTER 9</a:t>
             </a:r>
             <a:endParaRPr lang="en-US" sz="1200" dirty="0"/>
@@ -15390,7 +16461,7 @@
             <a:pPr algn="r"/>
             <a:fld id="{F7021451-1387-4CA6-816F-3879F97B5CBC}" type="slidenum">
               <a:rPr b="0" lang="en-US"/>
-              <a:t>23</a:t>
+              <a:t>24</a:t>
             </a:fld>
             <a:endParaRPr lang="en-US"/>
           </a:p>
@@ -16143,7 +17214,7 @@
                 <a:ea typeface="Cambria" pitchFamily="34" charset="-122"/>
                 <a:cs typeface="Cambria" pitchFamily="34" charset="-120"/>
               </a:rPr>
-              <a:t>Six sections, a worked example and a lab</a:t>
+              <a:t>Six sections, a worked example, a case and a lab</a:t>
             </a:r>
             <a:endParaRPr lang="en-US" sz="3200" dirty="0"/>
           </a:p>
@@ -16158,11 +17229,11 @@
         <p:spPr>
           <a:xfrm>
             <a:off x="548640" y="1691640"/>
-            <a:ext cx="2567864" cy="2103120"/>
+            <a:ext cx="1999427" cy="2103120"/>
           </a:xfrm>
           <a:prstGeom prst="roundRect">
             <a:avLst>
-              <a:gd name="adj" fmla="val 3478"/>
+              <a:gd name="adj" fmla="val 3659"/>
             </a:avLst>
           </a:prstGeom>
           <a:solidFill>
@@ -16185,7 +17256,7 @@
         <p:spPr>
           <a:xfrm>
             <a:off x="731520" y="1819656"/>
-            <a:ext cx="2202104" cy="310896"/>
+            <a:ext cx="1633667" cy="310896"/>
           </a:xfrm>
           <a:prstGeom prst="rect">
             <a:avLst/>
@@ -16221,7 +17292,7 @@
         <p:spPr>
           <a:xfrm>
             <a:off x="731520" y="2148840"/>
-            <a:ext cx="2202104" cy="1060704"/>
+            <a:ext cx="1633667" cy="1060704"/>
           </a:xfrm>
           <a:prstGeom prst="rect">
             <a:avLst/>
@@ -16237,7 +17308,7 @@
               <a:buNone/>
             </a:pPr>
             <a:r>
-              <a:rPr lang="en-US" sz="1500" b="1" dirty="0">
+              <a:rPr lang="en-US" sz="1300" b="1" dirty="0">
                 <a:solidFill>
                   <a:schemeClr val="tx1"/>
                 </a:solidFill>
@@ -16247,7 +17318,7 @@
               </a:rPr>
               <a:t>From the Bellman Equation to a Differential Equation</a:t>
             </a:r>
-            <a:endParaRPr lang="en-US" sz="1500" dirty="0"/>
+            <a:endParaRPr lang="en-US" sz="1300" dirty="0"/>
           </a:p>
         </p:txBody>
       </p:sp>
@@ -16260,7 +17331,7 @@
         <p:spPr>
           <a:xfrm>
             <a:off x="731520" y="3282696"/>
-            <a:ext cx="2202104" cy="384048"/>
+            <a:ext cx="1633667" cy="384048"/>
           </a:xfrm>
           <a:prstGeom prst="rect">
             <a:avLst/>
@@ -16276,14 +17347,14 @@
               <a:buNone/>
             </a:pPr>
             <a:r>
-              <a:rPr lang="en-US" sz="1300" dirty="0">
+              <a:rPr lang="en-US" sz="1200" dirty="0">
                 <a:solidFill>
                   <a:schemeClr val="tx2"/>
                 </a:solidFill>
               </a:rPr>
               <a:t>Definition 8.1 · Theorem 8.1 · Table 8.1</a:t>
             </a:r>
-            <a:endParaRPr lang="en-US" sz="1300" dirty="0"/>
+            <a:endParaRPr lang="en-US" sz="1200" dirty="0"/>
           </a:p>
         </p:txBody>
       </p:sp>
@@ -16295,12 +17366,12 @@
         </p:nvSpPr>
         <p:spPr>
           <a:xfrm>
-            <a:off x="3390824" y="1691640"/>
-            <a:ext cx="2567864" cy="2103120"/>
+            <a:off x="2822387" y="1691640"/>
+            <a:ext cx="1999427" cy="2103120"/>
           </a:xfrm>
           <a:prstGeom prst="roundRect">
             <a:avLst>
-              <a:gd name="adj" fmla="val 3478"/>
+              <a:gd name="adj" fmla="val 3659"/>
             </a:avLst>
           </a:prstGeom>
           <a:solidFill>
@@ -16322,8 +17393,8 @@
         </p:nvSpPr>
         <p:spPr>
           <a:xfrm>
-            <a:off x="3573704" y="1819656"/>
-            <a:ext cx="2202104" cy="310896"/>
+            <a:off x="3005267" y="1819656"/>
+            <a:ext cx="1633667" cy="310896"/>
           </a:xfrm>
           <a:prstGeom prst="rect">
             <a:avLst/>
@@ -16358,8 +17429,8 @@
         </p:nvSpPr>
         <p:spPr>
           <a:xfrm>
-            <a:off x="3573704" y="2148840"/>
-            <a:ext cx="2202104" cy="1060704"/>
+            <a:off x="3005267" y="2148840"/>
+            <a:ext cx="1633667" cy="1060704"/>
           </a:xfrm>
           <a:prstGeom prst="rect">
             <a:avLst/>
@@ -16375,7 +17446,7 @@
               <a:buNone/>
             </a:pPr>
             <a:r>
-              <a:rPr lang="en-US" sz="1500" b="1" dirty="0">
+              <a:rPr lang="en-US" sz="1300" b="1" dirty="0">
                 <a:solidFill>
                   <a:schemeClr val="tx1"/>
                 </a:solidFill>
@@ -16385,7 +17456,7 @@
               </a:rPr>
               <a:t>Prices and Rules from the HJB Equation</a:t>
             </a:r>
-            <a:endParaRPr lang="en-US" sz="1500" dirty="0"/>
+            <a:endParaRPr lang="en-US" sz="1300" dirty="0"/>
           </a:p>
         </p:txBody>
       </p:sp>
@@ -16397,8 +17468,8 @@
         </p:nvSpPr>
         <p:spPr>
           <a:xfrm>
-            <a:off x="3573704" y="3282696"/>
-            <a:ext cx="2202104" cy="384048"/>
+            <a:off x="3005267" y="3282696"/>
+            <a:ext cx="1633667" cy="384048"/>
           </a:xfrm>
           <a:prstGeom prst="rect">
             <a:avLst/>
@@ -16414,14 +17485,14 @@
               <a:buNone/>
             </a:pPr>
             <a:r>
-              <a:rPr lang="en-US" sz="1300" dirty="0">
+              <a:rPr lang="en-US" sz="1200" dirty="0">
                 <a:solidFill>
                   <a:schemeClr val="tx2"/>
                 </a:solidFill>
               </a:rPr>
               <a:t>Proposition 8.1</a:t>
             </a:r>
-            <a:endParaRPr lang="en-US" sz="1300" dirty="0"/>
+            <a:endParaRPr lang="en-US" sz="1200" dirty="0"/>
           </a:p>
         </p:txBody>
       </p:sp>
@@ -16433,12 +17504,12 @@
         </p:nvSpPr>
         <p:spPr>
           <a:xfrm>
-            <a:off x="6233008" y="1691640"/>
-            <a:ext cx="2567864" cy="2103120"/>
+            <a:off x="5096134" y="1691640"/>
+            <a:ext cx="1999427" cy="2103120"/>
           </a:xfrm>
           <a:prstGeom prst="roundRect">
             <a:avLst>
-              <a:gd name="adj" fmla="val 3478"/>
+              <a:gd name="adj" fmla="val 3659"/>
             </a:avLst>
           </a:prstGeom>
           <a:solidFill>
@@ -16460,8 +17531,8 @@
         </p:nvSpPr>
         <p:spPr>
           <a:xfrm>
-            <a:off x="6415888" y="1819656"/>
-            <a:ext cx="2202104" cy="310896"/>
+            <a:off x="5279014" y="1819656"/>
+            <a:ext cx="1633667" cy="310896"/>
           </a:xfrm>
           <a:prstGeom prst="rect">
             <a:avLst/>
@@ -16496,8 +17567,8 @@
         </p:nvSpPr>
         <p:spPr>
           <a:xfrm>
-            <a:off x="6415888" y="2148840"/>
-            <a:ext cx="2202104" cy="1060704"/>
+            <a:off x="5279014" y="2148840"/>
+            <a:ext cx="1633667" cy="1060704"/>
           </a:xfrm>
           <a:prstGeom prst="rect">
             <a:avLst/>
@@ -16513,7 +17584,7 @@
               <a:buNone/>
             </a:pPr>
             <a:r>
-              <a:rPr lang="en-US" sz="1500" b="1" dirty="0">
+              <a:rPr lang="en-US" sz="1300" b="1" dirty="0">
                 <a:solidFill>
                   <a:schemeClr val="tx1"/>
                 </a:solidFill>
@@ -16523,7 +17594,7 @@
               </a:rPr>
               <a:t>Certifying a Rule</a:t>
             </a:r>
-            <a:endParaRPr lang="en-US" sz="1500" dirty="0"/>
+            <a:endParaRPr lang="en-US" sz="1300" dirty="0"/>
           </a:p>
         </p:txBody>
       </p:sp>
@@ -16535,8 +17606,8 @@
         </p:nvSpPr>
         <p:spPr>
           <a:xfrm>
-            <a:off x="6415888" y="3282696"/>
-            <a:ext cx="2202104" cy="384048"/>
+            <a:off x="5279014" y="3282696"/>
+            <a:ext cx="1633667" cy="384048"/>
           </a:xfrm>
           <a:prstGeom prst="rect">
             <a:avLst/>
@@ -16552,14 +17623,14 @@
               <a:buNone/>
             </a:pPr>
             <a:r>
-              <a:rPr lang="en-US" sz="1300" dirty="0">
+              <a:rPr lang="en-US" sz="1200" dirty="0">
                 <a:solidFill>
                   <a:schemeClr val="tx2"/>
                 </a:solidFill>
               </a:rPr>
               <a:t>Theorem 8.2</a:t>
             </a:r>
-            <a:endParaRPr lang="en-US" sz="1300" dirty="0"/>
+            <a:endParaRPr lang="en-US" sz="1200" dirty="0"/>
           </a:p>
         </p:txBody>
       </p:sp>
@@ -16571,12 +17642,12 @@
         </p:nvSpPr>
         <p:spPr>
           <a:xfrm>
-            <a:off x="9075191" y="1691640"/>
-            <a:ext cx="2567864" cy="2103120"/>
+            <a:off x="7369881" y="1691640"/>
+            <a:ext cx="1999427" cy="2103120"/>
           </a:xfrm>
           <a:prstGeom prst="roundRect">
             <a:avLst>
-              <a:gd name="adj" fmla="val 3478"/>
+              <a:gd name="adj" fmla="val 3659"/>
             </a:avLst>
           </a:prstGeom>
           <a:solidFill>
@@ -16598,8 +17669,8 @@
         </p:nvSpPr>
         <p:spPr>
           <a:xfrm>
-            <a:off x="9258071" y="1819656"/>
-            <a:ext cx="2202104" cy="310896"/>
+            <a:off x="7552761" y="1819656"/>
+            <a:ext cx="1633667" cy="310896"/>
           </a:xfrm>
           <a:prstGeom prst="rect">
             <a:avLst/>
@@ -16634,8 +17705,8 @@
         </p:nvSpPr>
         <p:spPr>
           <a:xfrm>
-            <a:off x="9258071" y="2148840"/>
-            <a:ext cx="2202104" cy="1060704"/>
+            <a:off x="7552761" y="2148840"/>
+            <a:ext cx="1633667" cy="1060704"/>
           </a:xfrm>
           <a:prstGeom prst="rect">
             <a:avLst/>
@@ -16651,7 +17722,7 @@
               <a:buNone/>
             </a:pPr>
             <a:r>
-              <a:rPr lang="en-US" sz="1500" b="1" dirty="0">
+              <a:rPr lang="en-US" sz="1300" b="1" dirty="0">
                 <a:solidFill>
                   <a:schemeClr val="tx1"/>
                 </a:solidFill>
@@ -16661,7 +17732,7 @@
               </a:rPr>
               <a:t>Corners in the Value</a:t>
             </a:r>
-            <a:endParaRPr lang="en-US" sz="1500" dirty="0"/>
+            <a:endParaRPr lang="en-US" sz="1300" dirty="0"/>
           </a:p>
         </p:txBody>
       </p:sp>
@@ -16673,8 +17744,8 @@
         </p:nvSpPr>
         <p:spPr>
           <a:xfrm>
-            <a:off x="9258071" y="3282696"/>
-            <a:ext cx="2202104" cy="384048"/>
+            <a:off x="7552761" y="3282696"/>
+            <a:ext cx="1633667" cy="384048"/>
           </a:xfrm>
           <a:prstGeom prst="rect">
             <a:avLst/>
@@ -16690,14 +17761,14 @@
               <a:buNone/>
             </a:pPr>
             <a:r>
-              <a:rPr lang="en-US" sz="1300" dirty="0">
+              <a:rPr lang="en-US" sz="1200" dirty="0">
                 <a:solidFill>
                   <a:schemeClr val="tx2"/>
                 </a:solidFill>
               </a:rPr>
               <a:t>Proposition 8.2 · Figure 8.1</a:t>
             </a:r>
-            <a:endParaRPr lang="en-US" sz="1300" dirty="0"/>
+            <a:endParaRPr lang="en-US" sz="1200" dirty="0"/>
           </a:p>
         </p:txBody>
       </p:sp>
@@ -16709,12 +17780,12 @@
         </p:nvSpPr>
         <p:spPr>
           <a:xfrm>
-            <a:off x="548640" y="4069080"/>
-            <a:ext cx="2567864" cy="2103120"/>
+            <a:off x="9643628" y="1691640"/>
+            <a:ext cx="1999427" cy="2103120"/>
           </a:xfrm>
           <a:prstGeom prst="roundRect">
             <a:avLst>
-              <a:gd name="adj" fmla="val 3478"/>
+              <a:gd name="adj" fmla="val 3659"/>
             </a:avLst>
           </a:prstGeom>
           <a:solidFill>
@@ -16736,8 +17807,8 @@
         </p:nvSpPr>
         <p:spPr>
           <a:xfrm>
-            <a:off x="731520" y="4197096"/>
-            <a:ext cx="2202104" cy="310896"/>
+            <a:off x="9826508" y="1819656"/>
+            <a:ext cx="1633667" cy="310896"/>
           </a:xfrm>
           <a:prstGeom prst="rect">
             <a:avLst/>
@@ -16772,8 +17843,8 @@
         </p:nvSpPr>
         <p:spPr>
           <a:xfrm>
-            <a:off x="731520" y="4526280"/>
-            <a:ext cx="2202104" cy="1060704"/>
+            <a:off x="9826508" y="2148840"/>
+            <a:ext cx="1633667" cy="1060704"/>
           </a:xfrm>
           <a:prstGeom prst="rect">
             <a:avLst/>
@@ -16789,7 +17860,7 @@
               <a:buNone/>
             </a:pPr>
             <a:r>
-              <a:rPr lang="en-US" sz="1500" b="1" dirty="0">
+              <a:rPr lang="en-US" sz="1300" b="1" dirty="0">
                 <a:solidFill>
                   <a:schemeClr val="tx1"/>
                 </a:solidFill>
@@ -16799,7 +17870,7 @@
               </a:rPr>
               <a:t>Linear–Quadratic Rules</a:t>
             </a:r>
-            <a:endParaRPr lang="en-US" sz="1500" dirty="0"/>
+            <a:endParaRPr lang="en-US" sz="1300" dirty="0"/>
           </a:p>
         </p:txBody>
       </p:sp>
@@ -16811,8 +17882,8 @@
         </p:nvSpPr>
         <p:spPr>
           <a:xfrm>
-            <a:off x="731520" y="5660136"/>
-            <a:ext cx="2202104" cy="384048"/>
+            <a:off x="9826508" y="3282696"/>
+            <a:ext cx="1633667" cy="384048"/>
           </a:xfrm>
           <a:prstGeom prst="rect">
             <a:avLst/>
@@ -16828,14 +17899,14 @@
               <a:buNone/>
             </a:pPr>
             <a:r>
-              <a:rPr lang="en-US" sz="1300" dirty="0">
+              <a:rPr lang="en-US" sz="1200" dirty="0">
                 <a:solidFill>
                   <a:schemeClr val="tx2"/>
                 </a:solidFill>
               </a:rPr>
               <a:t>Theorem 8.3 · Proposition 8.3</a:t>
             </a:r>
-            <a:endParaRPr lang="en-US" sz="1300" dirty="0"/>
+            <a:endParaRPr lang="en-US" sz="1200" dirty="0"/>
           </a:p>
         </p:txBody>
       </p:sp>
@@ -16847,12 +17918,12 @@
         </p:nvSpPr>
         <p:spPr>
           <a:xfrm>
-            <a:off x="3390824" y="4069080"/>
-            <a:ext cx="2567864" cy="2103120"/>
+            <a:off x="548640" y="4069080"/>
+            <a:ext cx="1999427" cy="2103120"/>
           </a:xfrm>
           <a:prstGeom prst="roundRect">
             <a:avLst>
-              <a:gd name="adj" fmla="val 3478"/>
+              <a:gd name="adj" fmla="val 3659"/>
             </a:avLst>
           </a:prstGeom>
           <a:solidFill>
@@ -16874,8 +17945,8 @@
         </p:nvSpPr>
         <p:spPr>
           <a:xfrm>
-            <a:off x="3573704" y="4197096"/>
-            <a:ext cx="2202104" cy="310896"/>
+            <a:off x="731520" y="4197096"/>
+            <a:ext cx="1633667" cy="310896"/>
           </a:xfrm>
           <a:prstGeom prst="rect">
             <a:avLst/>
@@ -16910,8 +17981,8 @@
         </p:nvSpPr>
         <p:spPr>
           <a:xfrm>
-            <a:off x="3573704" y="4526280"/>
-            <a:ext cx="2202104" cy="1060704"/>
+            <a:off x="731520" y="4526280"/>
+            <a:ext cx="1633667" cy="1060704"/>
           </a:xfrm>
           <a:prstGeom prst="rect">
             <a:avLst/>
@@ -16927,7 +17998,7 @@
               <a:buNone/>
             </a:pPr>
             <a:r>
-              <a:rPr lang="en-US" sz="1500" b="1" dirty="0">
+              <a:rPr lang="en-US" sz="1300" b="1" dirty="0">
                 <a:solidFill>
                   <a:schemeClr val="tx1"/>
                 </a:solidFill>
@@ -16937,7 +18008,7 @@
               </a:rPr>
               <a:t>Computing Values and Rules</a:t>
             </a:r>
-            <a:endParaRPr lang="en-US" sz="1500" dirty="0"/>
+            <a:endParaRPr lang="en-US" sz="1300" dirty="0"/>
           </a:p>
         </p:txBody>
       </p:sp>
@@ -16949,8 +18020,8 @@
         </p:nvSpPr>
         <p:spPr>
           <a:xfrm>
-            <a:off x="3573704" y="5660136"/>
-            <a:ext cx="2202104" cy="384048"/>
+            <a:off x="731520" y="5660136"/>
+            <a:ext cx="1633667" cy="384048"/>
           </a:xfrm>
           <a:prstGeom prst="rect">
             <a:avLst/>
@@ -16966,14 +18037,14 @@
               <a:buNone/>
             </a:pPr>
             <a:r>
-              <a:rPr lang="en-US" sz="1300" dirty="0">
+              <a:rPr lang="en-US" sz="1200" dirty="0">
                 <a:solidFill>
                   <a:schemeClr val="tx2"/>
                 </a:solidFill>
               </a:rPr>
               <a:t>Proposition 8.4 · Table 8.2</a:t>
             </a:r>
-            <a:endParaRPr lang="en-US" sz="1300" dirty="0"/>
+            <a:endParaRPr lang="en-US" sz="1200" dirty="0"/>
           </a:p>
         </p:txBody>
       </p:sp>
@@ -16985,12 +18056,12 @@
         </p:nvSpPr>
         <p:spPr>
           <a:xfrm>
-            <a:off x="6233008" y="4069080"/>
-            <a:ext cx="2567864" cy="2103120"/>
+            <a:off x="2822387" y="4069080"/>
+            <a:ext cx="1999427" cy="2103120"/>
           </a:xfrm>
           <a:prstGeom prst="roundRect">
             <a:avLst>
-              <a:gd name="adj" fmla="val 3478"/>
+              <a:gd name="adj" fmla="val 3659"/>
             </a:avLst>
           </a:prstGeom>
           <a:solidFill>
@@ -17012,8 +18083,8 @@
         </p:nvSpPr>
         <p:spPr>
           <a:xfrm>
-            <a:off x="6415888" y="4197096"/>
-            <a:ext cx="2202104" cy="310896"/>
+            <a:off x="3005267" y="4197096"/>
+            <a:ext cx="1633667" cy="310896"/>
           </a:xfrm>
           <a:prstGeom prst="rect">
             <a:avLst/>
@@ -17048,8 +18119,8 @@
         </p:nvSpPr>
         <p:spPr>
           <a:xfrm>
-            <a:off x="6415888" y="4526280"/>
-            <a:ext cx="2202104" cy="1060704"/>
+            <a:off x="3005267" y="4526280"/>
+            <a:ext cx="1633667" cy="1060704"/>
           </a:xfrm>
           <a:prstGeom prst="rect">
             <a:avLst/>
@@ -17065,7 +18136,7 @@
               <a:buNone/>
             </a:pPr>
             <a:r>
-              <a:rPr lang="en-US" sz="1500" b="1" dirty="0">
+              <a:rPr lang="en-US" sz="1300" b="1" dirty="0">
                 <a:solidFill>
                   <a:schemeClr val="bg1"/>
                 </a:solidFill>
@@ -17075,7 +18146,7 @@
               </a:rPr>
               <a:t>How Fast Should Meridian Close Its Engineering Gap?</a:t>
             </a:r>
-            <a:endParaRPr lang="en-US" sz="1500" dirty="0"/>
+            <a:endParaRPr lang="en-US" sz="1300" dirty="0"/>
           </a:p>
         </p:txBody>
       </p:sp>
@@ -17087,8 +18158,8 @@
         </p:nvSpPr>
         <p:spPr>
           <a:xfrm>
-            <a:off x="6415888" y="5660136"/>
-            <a:ext cx="2202104" cy="384048"/>
+            <a:off x="3005267" y="5660136"/>
+            <a:ext cx="1633667" cy="384048"/>
           </a:xfrm>
           <a:prstGeom prst="rect">
             <a:avLst/>
@@ -17104,14 +18175,14 @@
               <a:buNone/>
             </a:pPr>
             <a:r>
-              <a:rPr lang="en-US" sz="1300" dirty="0">
+              <a:rPr lang="en-US" sz="1200" dirty="0">
                 <a:solidFill>
                   <a:schemeClr val="bg2"/>
                 </a:solidFill>
               </a:rPr>
               <a:t>Table 8.3 · Figures 8.2–8.3</a:t>
             </a:r>
-            <a:endParaRPr lang="en-US" sz="1300" dirty="0"/>
+            <a:endParaRPr lang="en-US" sz="1200" dirty="0"/>
           </a:p>
         </p:txBody>
       </p:sp>
@@ -17123,12 +18194,12 @@
         </p:nvSpPr>
         <p:spPr>
           <a:xfrm>
-            <a:off x="9075191" y="4069080"/>
-            <a:ext cx="2567864" cy="2103120"/>
+            <a:off x="5096134" y="4069080"/>
+            <a:ext cx="1999427" cy="2103120"/>
           </a:xfrm>
           <a:prstGeom prst="roundRect">
             <a:avLst>
-              <a:gd name="adj" fmla="val 3478"/>
+              <a:gd name="adj" fmla="val 3659"/>
             </a:avLst>
           </a:prstGeom>
           <a:solidFill>
@@ -17150,8 +18221,8 @@
         </p:nvSpPr>
         <p:spPr>
           <a:xfrm>
-            <a:off x="9258071" y="4197096"/>
-            <a:ext cx="2202104" cy="310896"/>
+            <a:off x="5279014" y="4197096"/>
+            <a:ext cx="1633667" cy="310896"/>
           </a:xfrm>
           <a:prstGeom prst="rect">
             <a:avLst/>
@@ -17172,7 +18243,7 @@
                   <a:schemeClr val="accent1"/>
                 </a:solidFill>
               </a:rPr>
-              <a:t>AXIOM Lab 2.8</a:t>
+              <a:t>In Practice</a:t>
             </a:r>
             <a:endParaRPr lang="en-US" sz="1300" dirty="0"/>
           </a:p>
@@ -17186,8 +18257,8 @@
         </p:nvSpPr>
         <p:spPr>
           <a:xfrm>
-            <a:off x="9258071" y="4526280"/>
-            <a:ext cx="2202104" cy="1060704"/>
+            <a:off x="5279014" y="4526280"/>
+            <a:ext cx="1633667" cy="1060704"/>
           </a:xfrm>
           <a:prstGeom prst="rect">
             <a:avLst/>
@@ -17203,7 +18274,7 @@
               <a:buNone/>
             </a:pPr>
             <a:r>
-              <a:rPr lang="en-US" sz="1500" b="1" dirty="0">
+              <a:rPr lang="en-US" sz="1300" b="1" dirty="0">
                 <a:solidFill>
                   <a:schemeClr val="tx1"/>
                 </a:solidFill>
@@ -17211,9 +18282,9 @@
                 <a:ea typeface="Cambria" pitchFamily="34" charset="-122"/>
                 <a:cs typeface="Cambria" pitchFamily="34" charset="-120"/>
               </a:rPr>
-              <a:t>Steering by the Value: Meridian's Hiring Rule and Capability Floor</a:t>
-            </a:r>
-            <a:endParaRPr lang="en-US" sz="1500" dirty="0"/>
+              <a:t>Brokers Pace a Large Sale</a:t>
+            </a:r>
+            <a:endParaRPr lang="en-US" sz="1300" dirty="0"/>
           </a:p>
         </p:txBody>
       </p:sp>
@@ -17225,8 +18296,8 @@
         </p:nvSpPr>
         <p:spPr>
           <a:xfrm>
-            <a:off x="9258071" y="5660136"/>
-            <a:ext cx="2202104" cy="384048"/>
+            <a:off x="5279014" y="5660136"/>
+            <a:ext cx="1633667" cy="384048"/>
           </a:xfrm>
           <a:prstGeom prst="rect">
             <a:avLst/>
@@ -17242,14 +18313,152 @@
               <a:buNone/>
             </a:pPr>
             <a:r>
-              <a:rPr lang="en-US" sz="1300" dirty="0">
+              <a:rPr lang="en-US" sz="1200" dirty="0">
                 <a:solidFill>
                   <a:schemeClr val="tx2"/>
                 </a:solidFill>
               </a:rPr>
+              <a:t>At a Glance · board questions</a:t>
+            </a:r>
+            <a:endParaRPr lang="en-US" sz="1200" dirty="0"/>
+          </a:p>
+        </p:txBody>
+      </p:sp>
+      <p:sp>
+        <p:nvSpPr>
+          <p:cNvPr id="37" name="Card"/>
+          <p:cNvSpPr/>
+          <p:nvPr/>
+        </p:nvSpPr>
+        <p:spPr>
+          <a:xfrm>
+            <a:off x="7369881" y="4069080"/>
+            <a:ext cx="1999427" cy="2103120"/>
+          </a:xfrm>
+          <a:prstGeom prst="roundRect">
+            <a:avLst>
+              <a:gd name="adj" fmla="val 3659"/>
+            </a:avLst>
+          </a:prstGeom>
+          <a:solidFill>
+            <a:schemeClr val="bg2"/>
+          </a:solidFill>
+          <a:ln w="9525">
+            <a:solidFill>
+              <a:srgbClr val="C4CBD8"/>
+            </a:solidFill>
+            <a:prstDash val="solid"/>
+          </a:ln>
+        </p:spPr>
+      </p:sp>
+      <p:sp>
+        <p:nvSpPr>
+          <p:cNvPr id="38" name="Card label"/>
+          <p:cNvSpPr txBox="1"/>
+          <p:nvPr/>
+        </p:nvSpPr>
+        <p:spPr>
+          <a:xfrm>
+            <a:off x="7552761" y="4197096"/>
+            <a:ext cx="1633667" cy="310896"/>
+          </a:xfrm>
+          <a:prstGeom prst="rect">
+            <a:avLst/>
+          </a:prstGeom>
+          <a:noFill/>
+          <a:ln/>
+        </p:spPr>
+        <p:txBody>
+          <a:bodyPr wrap="square" lIns="0" tIns="0" rIns="0" bIns="0" rtlCol="0" anchor="ctr"/>
+          <a:lstStyle/>
+          <a:p>
+            <a:pPr indent="0" marL="0">
+              <a:buNone/>
+            </a:pPr>
+            <a:r>
+              <a:rPr lang="en-US" sz="1300" b="1" dirty="0">
+                <a:solidFill>
+                  <a:schemeClr val="accent1"/>
+                </a:solidFill>
+              </a:rPr>
+              <a:t>AXIOM Lab 2.8</a:t>
+            </a:r>
+            <a:endParaRPr lang="en-US" sz="1300" dirty="0"/>
+          </a:p>
+        </p:txBody>
+      </p:sp>
+      <p:sp>
+        <p:nvSpPr>
+          <p:cNvPr id="39" name="Card head"/>
+          <p:cNvSpPr txBox="1"/>
+          <p:nvPr/>
+        </p:nvSpPr>
+        <p:spPr>
+          <a:xfrm>
+            <a:off x="7552761" y="4526280"/>
+            <a:ext cx="1633667" cy="1060704"/>
+          </a:xfrm>
+          <a:prstGeom prst="rect">
+            <a:avLst/>
+          </a:prstGeom>
+          <a:noFill/>
+          <a:ln/>
+        </p:spPr>
+        <p:txBody>
+          <a:bodyPr wrap="square" lIns="0" tIns="0" rIns="0" bIns="0" rtlCol="0" anchor="t"/>
+          <a:lstStyle/>
+          <a:p>
+            <a:pPr indent="0" marL="0">
+              <a:buNone/>
+            </a:pPr>
+            <a:r>
+              <a:rPr lang="en-US" sz="1300" b="1" dirty="0">
+                <a:solidFill>
+                  <a:schemeClr val="tx1"/>
+                </a:solidFill>
+                <a:latin typeface="Cambria" pitchFamily="34" charset="0"/>
+                <a:ea typeface="Cambria" pitchFamily="34" charset="-122"/>
+                <a:cs typeface="Cambria" pitchFamily="34" charset="-120"/>
+              </a:rPr>
+              <a:t>Steering by the Value: Meridian's Hiring Rule and Capability Floor</a:t>
+            </a:r>
+            <a:endParaRPr lang="en-US" sz="1300" dirty="0"/>
+          </a:p>
+        </p:txBody>
+      </p:sp>
+      <p:sp>
+        <p:nvSpPr>
+          <p:cNvPr id="40" name="Card text"/>
+          <p:cNvSpPr txBox="1"/>
+          <p:nvPr/>
+        </p:nvSpPr>
+        <p:spPr>
+          <a:xfrm>
+            <a:off x="7552761" y="5660136"/>
+            <a:ext cx="1633667" cy="384048"/>
+          </a:xfrm>
+          <a:prstGeom prst="rect">
+            <a:avLst/>
+          </a:prstGeom>
+          <a:noFill/>
+          <a:ln/>
+        </p:spPr>
+        <p:txBody>
+          <a:bodyPr wrap="square" lIns="0" tIns="0" rIns="0" bIns="0" rtlCol="0" anchor="t"/>
+          <a:lstStyle/>
+          <a:p>
+            <a:pPr indent="0" marL="0">
+              <a:buNone/>
+            </a:pPr>
+            <a:r>
+              <a:rPr lang="en-US" sz="1200" dirty="0">
+                <a:solidFill>
+                  <a:schemeClr val="tx2"/>
+                </a:solidFill>
+              </a:rPr>
               <a:t>AXIOM-08 · five steps</a:t>
             </a:r>
-            <a:endParaRPr lang="en-US" sz="1300" dirty="0"/>
+            <a:endParaRPr lang="en-US" sz="1200" dirty="0"/>
           </a:p>
         </p:txBody>
       </p:sp>
